--- a/Functorium.pptx
+++ b/Functorium.pptx
@@ -3335,6 +3335,66 @@
       </p:grpSpPr>
       <p:sp>
         <p:nvSpPr>
+          <p:cNvPr id="11" name="직사각형 10">
+            <a:extLst>
+              <a:ext uri="{FF2B5EF4-FFF2-40B4-BE49-F238E27FC236}">
+                <a16:creationId xmlns:a16="http://schemas.microsoft.com/office/drawing/2014/main" id="{25AD359E-5640-E4B1-2FFE-CAA601ECA6C6}"/>
+              </a:ext>
+            </a:extLst>
+          </p:cNvPr>
+          <p:cNvSpPr/>
+          <p:nvPr/>
+        </p:nvSpPr>
+        <p:spPr>
+          <a:xfrm>
+            <a:off x="955964" y="2215918"/>
+            <a:ext cx="10790959" cy="264124"/>
+          </a:xfrm>
+          <a:prstGeom prst="rect">
+            <a:avLst/>
+          </a:prstGeom>
+          <a:solidFill>
+            <a:schemeClr val="accent2">
+              <a:lumMod val="20000"/>
+              <a:lumOff val="80000"/>
+            </a:schemeClr>
+          </a:solidFill>
+          <a:ln>
+            <a:solidFill>
+              <a:schemeClr val="accent2">
+                <a:lumMod val="20000"/>
+                <a:lumOff val="80000"/>
+              </a:schemeClr>
+            </a:solidFill>
+          </a:ln>
+        </p:spPr>
+        <p:style>
+          <a:lnRef idx="2">
+            <a:schemeClr val="accent1">
+              <a:shade val="15000"/>
+            </a:schemeClr>
+          </a:lnRef>
+          <a:fillRef idx="1">
+            <a:schemeClr val="accent1"/>
+          </a:fillRef>
+          <a:effectRef idx="0">
+            <a:schemeClr val="accent1"/>
+          </a:effectRef>
+          <a:fontRef idx="minor">
+            <a:schemeClr val="lt1"/>
+          </a:fontRef>
+        </p:style>
+        <p:txBody>
+          <a:bodyPr rtlCol="0" anchor="ctr"/>
+          <a:lstStyle/>
+          <a:p>
+            <a:pPr algn="ctr"/>
+            <a:endParaRPr lang="ko-KR" altLang="en-US"/>
+          </a:p>
+        </p:txBody>
+      </p:sp>
+      <p:sp>
+        <p:nvSpPr>
           <p:cNvPr id="14" name="타원 13">
             <a:extLst>
               <a:ext uri="{FF2B5EF4-FFF2-40B4-BE49-F238E27FC236}">
@@ -3387,10 +3447,10 @@
       </p:sp>
       <p:grpSp>
         <p:nvGrpSpPr>
-          <p:cNvPr id="9" name="그룹 8">
-            <a:extLst>
-              <a:ext uri="{FF2B5EF4-FFF2-40B4-BE49-F238E27FC236}">
-                <a16:creationId xmlns:a16="http://schemas.microsoft.com/office/drawing/2014/main" id="{30ABA8A4-767A-B2D1-DFB8-48E382D56491}"/>
+          <p:cNvPr id="8" name="그룹 7">
+            <a:extLst>
+              <a:ext uri="{FF2B5EF4-FFF2-40B4-BE49-F238E27FC236}">
+                <a16:creationId xmlns:a16="http://schemas.microsoft.com/office/drawing/2014/main" id="{29FBFE93-4EBE-85F6-0CC9-061083282764}"/>
               </a:ext>
             </a:extLst>
           </p:cNvPr>
@@ -3399,367 +3459,99 @@
         </p:nvGrpSpPr>
         <p:grpSpPr>
           <a:xfrm>
-            <a:off x="1111179" y="312658"/>
-            <a:ext cx="10480528" cy="6283599"/>
-            <a:chOff x="1069966" y="414258"/>
-            <a:chExt cx="10480528" cy="6283599"/>
+            <a:off x="1928131" y="2850454"/>
+            <a:ext cx="8862646" cy="1214438"/>
+            <a:chOff x="2476500" y="2557462"/>
+            <a:chExt cx="7159625" cy="981075"/>
           </a:xfrm>
         </p:grpSpPr>
-        <p:grpSp>
-          <p:nvGrpSpPr>
-            <p:cNvPr id="8" name="그룹 7">
+        <p:pic>
+          <p:nvPicPr>
+            <p:cNvPr id="5" name="그림 4">
               <a:extLst>
                 <a:ext uri="{FF2B5EF4-FFF2-40B4-BE49-F238E27FC236}">
-                  <a16:creationId xmlns:a16="http://schemas.microsoft.com/office/drawing/2014/main" id="{29FBFE93-4EBE-85F6-0CC9-061083282764}"/>
+                  <a16:creationId xmlns:a16="http://schemas.microsoft.com/office/drawing/2014/main" id="{0DEEA421-8C55-5E07-24EA-5807E6AC039C}"/>
                 </a:ext>
               </a:extLst>
             </p:cNvPr>
-            <p:cNvGrpSpPr/>
+            <p:cNvPicPr>
+              <a:picLocks noChangeAspect="1"/>
+            </p:cNvPicPr>
             <p:nvPr/>
-          </p:nvGrpSpPr>
-          <p:grpSpPr>
-            <a:xfrm>
-              <a:off x="1886918" y="2952054"/>
-              <a:ext cx="8862646" cy="1214438"/>
-              <a:chOff x="2476500" y="2557462"/>
-              <a:chExt cx="7159625" cy="981075"/>
-            </a:xfrm>
-          </p:grpSpPr>
-          <p:pic>
-            <p:nvPicPr>
-              <p:cNvPr id="5" name="그림 4">
-                <a:extLst>
-                  <a:ext uri="{FF2B5EF4-FFF2-40B4-BE49-F238E27FC236}">
-                    <a16:creationId xmlns:a16="http://schemas.microsoft.com/office/drawing/2014/main" id="{0DEEA421-8C55-5E07-24EA-5807E6AC039C}"/>
-                  </a:ext>
-                </a:extLst>
-              </p:cNvPr>
-              <p:cNvPicPr>
-                <a:picLocks noChangeAspect="1"/>
-              </p:cNvPicPr>
-              <p:nvPr/>
-            </p:nvPicPr>
-            <p:blipFill>
-              <a:blip r:embed="rId2"/>
-              <a:stretch>
-                <a:fillRect/>
-              </a:stretch>
-            </p:blipFill>
-            <p:spPr>
-              <a:xfrm>
-                <a:off x="2476500" y="2557462"/>
-                <a:ext cx="4257675" cy="981075"/>
-              </a:xfrm>
-              <a:prstGeom prst="rect">
-                <a:avLst/>
-              </a:prstGeom>
-            </p:spPr>
-          </p:pic>
-          <p:pic>
-            <p:nvPicPr>
-              <p:cNvPr id="7" name="그림 6">
-                <a:extLst>
-                  <a:ext uri="{FF2B5EF4-FFF2-40B4-BE49-F238E27FC236}">
-                    <a16:creationId xmlns:a16="http://schemas.microsoft.com/office/drawing/2014/main" id="{8769B09C-7A5B-D282-E29D-191084964936}"/>
-                  </a:ext>
-                </a:extLst>
-              </p:cNvPr>
-              <p:cNvPicPr>
-                <a:picLocks noChangeAspect="1"/>
-              </p:cNvPicPr>
-              <p:nvPr/>
-            </p:nvPicPr>
-            <p:blipFill>
-              <a:blip r:embed="rId3"/>
-              <a:stretch>
-                <a:fillRect/>
-              </a:stretch>
-            </p:blipFill>
-            <p:spPr>
-              <a:xfrm>
-                <a:off x="6588125" y="2563812"/>
-                <a:ext cx="3048000" cy="904875"/>
-              </a:xfrm>
-              <a:prstGeom prst="rect">
-                <a:avLst/>
-              </a:prstGeom>
-            </p:spPr>
-          </p:pic>
-        </p:grpSp>
-        <p:grpSp>
-          <p:nvGrpSpPr>
-            <p:cNvPr id="37" name="그룹 36">
-              <a:extLst>
-                <a:ext uri="{FF2B5EF4-FFF2-40B4-BE49-F238E27FC236}">
-                  <a16:creationId xmlns:a16="http://schemas.microsoft.com/office/drawing/2014/main" id="{960E446E-FFC8-5CCD-E9D6-B6F70ECF584E}"/>
-                </a:ext>
-              </a:extLst>
-            </p:cNvPr>
-            <p:cNvGrpSpPr/>
-            <p:nvPr/>
-          </p:nvGrpSpPr>
-          <p:grpSpPr>
-            <a:xfrm>
-              <a:off x="4679941" y="414258"/>
-              <a:ext cx="3124200" cy="5611719"/>
-              <a:chOff x="4679941" y="414259"/>
-              <a:chExt cx="3124200" cy="5470214"/>
-            </a:xfrm>
-          </p:grpSpPr>
-          <p:cxnSp>
-            <p:nvCxnSpPr>
-              <p:cNvPr id="12" name="직선 연결선 11">
-                <a:extLst>
-                  <a:ext uri="{FF2B5EF4-FFF2-40B4-BE49-F238E27FC236}">
-                    <a16:creationId xmlns:a16="http://schemas.microsoft.com/office/drawing/2014/main" id="{9860EDCC-6E4A-DCFB-4887-29FF771218FA}"/>
-                  </a:ext>
-                </a:extLst>
-              </p:cNvPr>
-              <p:cNvCxnSpPr>
-                <a:cxnSpLocks/>
-              </p:cNvCxnSpPr>
-              <p:nvPr/>
-            </p:nvCxnSpPr>
-            <p:spPr>
-              <a:xfrm>
-                <a:off x="4679941" y="414259"/>
-                <a:ext cx="0" cy="5470214"/>
-              </a:xfrm>
-              <a:prstGeom prst="line">
-                <a:avLst/>
-              </a:prstGeom>
-              <a:ln>
-                <a:solidFill>
-                  <a:schemeClr val="bg1">
-                    <a:lumMod val="85000"/>
-                  </a:schemeClr>
-                </a:solidFill>
-                <a:prstDash val="dash"/>
-              </a:ln>
-            </p:spPr>
-            <p:style>
-              <a:lnRef idx="2">
-                <a:schemeClr val="accent1"/>
-              </a:lnRef>
-              <a:fillRef idx="0">
-                <a:schemeClr val="accent1"/>
-              </a:fillRef>
-              <a:effectRef idx="1">
-                <a:schemeClr val="accent1"/>
-              </a:effectRef>
-              <a:fontRef idx="minor">
-                <a:schemeClr val="tx1"/>
-              </a:fontRef>
-            </p:style>
-          </p:cxnSp>
-          <p:cxnSp>
-            <p:nvCxnSpPr>
-              <p:cNvPr id="13" name="직선 연결선 12">
-                <a:extLst>
-                  <a:ext uri="{FF2B5EF4-FFF2-40B4-BE49-F238E27FC236}">
-                    <a16:creationId xmlns:a16="http://schemas.microsoft.com/office/drawing/2014/main" id="{717E0259-F161-E906-6807-37A82DE12543}"/>
-                  </a:ext>
-                </a:extLst>
-              </p:cNvPr>
-              <p:cNvCxnSpPr>
-                <a:cxnSpLocks/>
-              </p:cNvCxnSpPr>
-              <p:nvPr/>
-            </p:nvCxnSpPr>
-            <p:spPr>
-              <a:xfrm>
-                <a:off x="7804141" y="414259"/>
-                <a:ext cx="0" cy="5470214"/>
-              </a:xfrm>
-              <a:prstGeom prst="line">
-                <a:avLst/>
-              </a:prstGeom>
-              <a:ln>
-                <a:solidFill>
-                  <a:schemeClr val="bg1">
-                    <a:lumMod val="85000"/>
-                  </a:schemeClr>
-                </a:solidFill>
-                <a:prstDash val="dash"/>
-              </a:ln>
-            </p:spPr>
-            <p:style>
-              <a:lnRef idx="2">
-                <a:schemeClr val="accent1"/>
-              </a:lnRef>
-              <a:fillRef idx="0">
-                <a:schemeClr val="accent1"/>
-              </a:fillRef>
-              <a:effectRef idx="1">
-                <a:schemeClr val="accent1"/>
-              </a:effectRef>
-              <a:fontRef idx="minor">
-                <a:schemeClr val="tx1"/>
-              </a:fontRef>
-            </p:style>
-          </p:cxnSp>
-        </p:grpSp>
-        <p:grpSp>
-          <p:nvGrpSpPr>
-            <p:cNvPr id="31" name="그룹 30">
-              <a:extLst>
-                <a:ext uri="{FF2B5EF4-FFF2-40B4-BE49-F238E27FC236}">
-                  <a16:creationId xmlns:a16="http://schemas.microsoft.com/office/drawing/2014/main" id="{3B138185-6639-A2B7-BA25-7D42353A3241}"/>
-                </a:ext>
-              </a:extLst>
-            </p:cNvPr>
-            <p:cNvGrpSpPr/>
-            <p:nvPr/>
-          </p:nvGrpSpPr>
-          <p:grpSpPr>
-            <a:xfrm>
-              <a:off x="1069966" y="3480384"/>
-              <a:ext cx="10480528" cy="0"/>
-              <a:chOff x="1069966" y="3175585"/>
-              <a:chExt cx="10480528" cy="0"/>
-            </a:xfrm>
-          </p:grpSpPr>
-          <p:cxnSp>
-            <p:nvCxnSpPr>
-              <p:cNvPr id="19" name="직선 화살표 연결선 18">
-                <a:extLst>
-                  <a:ext uri="{FF2B5EF4-FFF2-40B4-BE49-F238E27FC236}">
-                    <a16:creationId xmlns:a16="http://schemas.microsoft.com/office/drawing/2014/main" id="{351652A1-CF24-5336-4933-55FA2F4249E6}"/>
-                  </a:ext>
-                </a:extLst>
-              </p:cNvPr>
-              <p:cNvCxnSpPr>
-                <a:cxnSpLocks/>
-              </p:cNvCxnSpPr>
-              <p:nvPr/>
-            </p:nvCxnSpPr>
-            <p:spPr>
-              <a:xfrm>
-                <a:off x="1069966" y="3175585"/>
-                <a:ext cx="926953" cy="0"/>
-              </a:xfrm>
-              <a:prstGeom prst="straightConnector1">
-                <a:avLst/>
-              </a:prstGeom>
-              <a:ln>
-                <a:tailEnd type="triangle"/>
-              </a:ln>
-            </p:spPr>
-            <p:style>
-              <a:lnRef idx="2">
-                <a:schemeClr val="accent1"/>
-              </a:lnRef>
-              <a:fillRef idx="0">
-                <a:schemeClr val="accent1"/>
-              </a:fillRef>
-              <a:effectRef idx="1">
-                <a:schemeClr val="accent1"/>
-              </a:effectRef>
-              <a:fontRef idx="minor">
-                <a:schemeClr val="tx1"/>
-              </a:fontRef>
-            </p:style>
-          </p:cxnSp>
-          <p:cxnSp>
-            <p:nvCxnSpPr>
-              <p:cNvPr id="20" name="직선 화살표 연결선 19">
-                <a:extLst>
-                  <a:ext uri="{FF2B5EF4-FFF2-40B4-BE49-F238E27FC236}">
-                    <a16:creationId xmlns:a16="http://schemas.microsoft.com/office/drawing/2014/main" id="{AB01EF0F-2BC8-D62B-A68B-C8B9D4A6716C}"/>
-                  </a:ext>
-                </a:extLst>
-              </p:cNvPr>
-              <p:cNvCxnSpPr>
-                <a:cxnSpLocks/>
-              </p:cNvCxnSpPr>
-              <p:nvPr/>
-            </p:nvCxnSpPr>
-            <p:spPr>
-              <a:xfrm>
-                <a:off x="10623541" y="3175585"/>
-                <a:ext cx="926953" cy="0"/>
-              </a:xfrm>
-              <a:prstGeom prst="straightConnector1">
-                <a:avLst/>
-              </a:prstGeom>
-              <a:ln>
-                <a:tailEnd type="triangle"/>
-              </a:ln>
-            </p:spPr>
-            <p:style>
-              <a:lnRef idx="2">
-                <a:schemeClr val="accent1"/>
-              </a:lnRef>
-              <a:fillRef idx="0">
-                <a:schemeClr val="accent1"/>
-              </a:fillRef>
-              <a:effectRef idx="1">
-                <a:schemeClr val="accent1"/>
-              </a:effectRef>
-              <a:fontRef idx="minor">
-                <a:schemeClr val="tx1"/>
-              </a:fontRef>
-            </p:style>
-          </p:cxnSp>
-        </p:grpSp>
-        <p:sp>
-          <p:nvSpPr>
-            <p:cNvPr id="22" name="직사각형 21">
-              <a:extLst>
-                <a:ext uri="{FF2B5EF4-FFF2-40B4-BE49-F238E27FC236}">
-                  <a16:creationId xmlns:a16="http://schemas.microsoft.com/office/drawing/2014/main" id="{ACC4F43D-0F34-11E1-29BF-7268019657EF}"/>
-                </a:ext>
-              </a:extLst>
-            </p:cNvPr>
-            <p:cNvSpPr/>
-            <p:nvPr/>
-          </p:nvSpPr>
+          </p:nvPicPr>
+          <p:blipFill>
+            <a:blip r:embed="rId2"/>
+            <a:stretch>
+              <a:fillRect/>
+            </a:stretch>
+          </p:blipFill>
           <p:spPr>
             <a:xfrm>
-              <a:off x="5463252" y="5105868"/>
-              <a:ext cx="1513301" cy="758941"/>
+              <a:off x="2476500" y="2557462"/>
+              <a:ext cx="4257675" cy="981075"/>
             </a:xfrm>
             <a:prstGeom prst="rect">
               <a:avLst/>
             </a:prstGeom>
-            <a:noFill/>
-            <a:ln>
-              <a:solidFill>
-                <a:srgbClr val="A4A4A4"/>
-              </a:solidFill>
-            </a:ln>
           </p:spPr>
-          <p:style>
-            <a:lnRef idx="2">
-              <a:schemeClr val="accent1">
-                <a:shade val="15000"/>
-              </a:schemeClr>
-            </a:lnRef>
-            <a:fillRef idx="1">
-              <a:schemeClr val="accent1"/>
-            </a:fillRef>
-            <a:effectRef idx="0">
-              <a:schemeClr val="accent1"/>
-            </a:effectRef>
-            <a:fontRef idx="minor">
-              <a:schemeClr val="lt1"/>
-            </a:fontRef>
-          </p:style>
-          <p:txBody>
-            <a:bodyPr rtlCol="0" anchor="ctr"/>
-            <a:lstStyle/>
-            <a:p>
-              <a:pPr algn="ctr"/>
-              <a:endParaRPr lang="ko-KR" altLang="en-US"/>
-            </a:p>
-          </p:txBody>
-        </p:sp>
+        </p:pic>
+        <p:pic>
+          <p:nvPicPr>
+            <p:cNvPr id="7" name="그림 6">
+              <a:extLst>
+                <a:ext uri="{FF2B5EF4-FFF2-40B4-BE49-F238E27FC236}">
+                  <a16:creationId xmlns:a16="http://schemas.microsoft.com/office/drawing/2014/main" id="{8769B09C-7A5B-D282-E29D-191084964936}"/>
+                </a:ext>
+              </a:extLst>
+            </p:cNvPr>
+            <p:cNvPicPr>
+              <a:picLocks noChangeAspect="1"/>
+            </p:cNvPicPr>
+            <p:nvPr/>
+          </p:nvPicPr>
+          <p:blipFill>
+            <a:blip r:embed="rId3"/>
+            <a:stretch>
+              <a:fillRect/>
+            </a:stretch>
+          </p:blipFill>
+          <p:spPr>
+            <a:xfrm>
+              <a:off x="6588125" y="2563812"/>
+              <a:ext cx="3048000" cy="904875"/>
+            </a:xfrm>
+            <a:prstGeom prst="rect">
+              <a:avLst/>
+            </a:prstGeom>
+          </p:spPr>
+        </p:pic>
+      </p:grpSp>
+      <p:grpSp>
+        <p:nvGrpSpPr>
+          <p:cNvPr id="37" name="그룹 36">
+            <a:extLst>
+              <a:ext uri="{FF2B5EF4-FFF2-40B4-BE49-F238E27FC236}">
+                <a16:creationId xmlns:a16="http://schemas.microsoft.com/office/drawing/2014/main" id="{960E446E-FFC8-5CCD-E9D6-B6F70ECF584E}"/>
+              </a:ext>
+            </a:extLst>
+          </p:cNvPr>
+          <p:cNvGrpSpPr/>
+          <p:nvPr/>
+        </p:nvGrpSpPr>
+        <p:grpSpPr>
+          <a:xfrm>
+            <a:off x="4721154" y="312658"/>
+            <a:ext cx="3124200" cy="5611719"/>
+            <a:chOff x="4679941" y="414259"/>
+            <a:chExt cx="3124200" cy="5470214"/>
+          </a:xfrm>
+        </p:grpSpPr>
         <p:cxnSp>
           <p:nvCxnSpPr>
-            <p:cNvPr id="24" name="직선 화살표 연결선 23">
+            <p:cNvPr id="12" name="직선 연결선 11">
               <a:extLst>
                 <a:ext uri="{FF2B5EF4-FFF2-40B4-BE49-F238E27FC236}">
-                  <a16:creationId xmlns:a16="http://schemas.microsoft.com/office/drawing/2014/main" id="{50050C19-C3EA-39E0-62BB-BE0EAF4CDD21}"/>
+                  <a16:creationId xmlns:a16="http://schemas.microsoft.com/office/drawing/2014/main" id="{9860EDCC-6E4A-DCFB-4887-29FF771218FA}"/>
                 </a:ext>
               </a:extLst>
             </p:cNvPr>
@@ -3770,16 +3562,126 @@
           </p:nvCxnSpPr>
           <p:spPr>
             <a:xfrm>
-              <a:off x="6219903" y="3852167"/>
-              <a:ext cx="0" cy="1253701"/>
+              <a:off x="4679941" y="414259"/>
+              <a:ext cx="0" cy="5470214"/>
+            </a:xfrm>
+            <a:prstGeom prst="line">
+              <a:avLst/>
+            </a:prstGeom>
+            <a:ln>
+              <a:solidFill>
+                <a:schemeClr val="bg1">
+                  <a:lumMod val="85000"/>
+                </a:schemeClr>
+              </a:solidFill>
+              <a:prstDash val="dash"/>
+            </a:ln>
+          </p:spPr>
+          <p:style>
+            <a:lnRef idx="2">
+              <a:schemeClr val="accent1"/>
+            </a:lnRef>
+            <a:fillRef idx="0">
+              <a:schemeClr val="accent1"/>
+            </a:fillRef>
+            <a:effectRef idx="1">
+              <a:schemeClr val="accent1"/>
+            </a:effectRef>
+            <a:fontRef idx="minor">
+              <a:schemeClr val="tx1"/>
+            </a:fontRef>
+          </p:style>
+        </p:cxnSp>
+        <p:cxnSp>
+          <p:nvCxnSpPr>
+            <p:cNvPr id="13" name="직선 연결선 12">
+              <a:extLst>
+                <a:ext uri="{FF2B5EF4-FFF2-40B4-BE49-F238E27FC236}">
+                  <a16:creationId xmlns:a16="http://schemas.microsoft.com/office/drawing/2014/main" id="{717E0259-F161-E906-6807-37A82DE12543}"/>
+                </a:ext>
+              </a:extLst>
+            </p:cNvPr>
+            <p:cNvCxnSpPr>
+              <a:cxnSpLocks/>
+            </p:cNvCxnSpPr>
+            <p:nvPr/>
+          </p:nvCxnSpPr>
+          <p:spPr>
+            <a:xfrm>
+              <a:off x="7804141" y="414259"/>
+              <a:ext cx="0" cy="5470214"/>
+            </a:xfrm>
+            <a:prstGeom prst="line">
+              <a:avLst/>
+            </a:prstGeom>
+            <a:ln>
+              <a:solidFill>
+                <a:schemeClr val="bg1">
+                  <a:lumMod val="85000"/>
+                </a:schemeClr>
+              </a:solidFill>
+              <a:prstDash val="dash"/>
+            </a:ln>
+          </p:spPr>
+          <p:style>
+            <a:lnRef idx="2">
+              <a:schemeClr val="accent1"/>
+            </a:lnRef>
+            <a:fillRef idx="0">
+              <a:schemeClr val="accent1"/>
+            </a:fillRef>
+            <a:effectRef idx="1">
+              <a:schemeClr val="accent1"/>
+            </a:effectRef>
+            <a:fontRef idx="minor">
+              <a:schemeClr val="tx1"/>
+            </a:fontRef>
+          </p:style>
+        </p:cxnSp>
+      </p:grpSp>
+      <p:grpSp>
+        <p:nvGrpSpPr>
+          <p:cNvPr id="31" name="그룹 30">
+            <a:extLst>
+              <a:ext uri="{FF2B5EF4-FFF2-40B4-BE49-F238E27FC236}">
+                <a16:creationId xmlns:a16="http://schemas.microsoft.com/office/drawing/2014/main" id="{3B138185-6639-A2B7-BA25-7D42353A3241}"/>
+              </a:ext>
+            </a:extLst>
+          </p:cNvPr>
+          <p:cNvGrpSpPr/>
+          <p:nvPr/>
+        </p:nvGrpSpPr>
+        <p:grpSpPr>
+          <a:xfrm>
+            <a:off x="1111179" y="3378784"/>
+            <a:ext cx="10480528" cy="0"/>
+            <a:chOff x="1069966" y="3175585"/>
+            <a:chExt cx="10480528" cy="0"/>
+          </a:xfrm>
+        </p:grpSpPr>
+        <p:cxnSp>
+          <p:nvCxnSpPr>
+            <p:cNvPr id="19" name="직선 화살표 연결선 18">
+              <a:extLst>
+                <a:ext uri="{FF2B5EF4-FFF2-40B4-BE49-F238E27FC236}">
+                  <a16:creationId xmlns:a16="http://schemas.microsoft.com/office/drawing/2014/main" id="{351652A1-CF24-5336-4933-55FA2F4249E6}"/>
+                </a:ext>
+              </a:extLst>
+            </p:cNvPr>
+            <p:cNvCxnSpPr>
+              <a:cxnSpLocks/>
+            </p:cNvCxnSpPr>
+            <p:nvPr/>
+          </p:nvCxnSpPr>
+          <p:spPr>
+            <a:xfrm>
+              <a:off x="1069966" y="3175585"/>
+              <a:ext cx="926953" cy="0"/>
             </a:xfrm>
             <a:prstGeom prst="straightConnector1">
               <a:avLst/>
             </a:prstGeom>
             <a:ln>
-              <a:solidFill>
-                <a:srgbClr val="A4A4A4"/>
-              </a:solidFill>
               <a:tailEnd type="triangle"/>
             </a:ln>
           </p:spPr>
@@ -3798,796 +3700,854 @@
             </a:fontRef>
           </p:style>
         </p:cxnSp>
-        <p:sp>
-          <p:nvSpPr>
-            <p:cNvPr id="25" name="직사각형 24">
+        <p:cxnSp>
+          <p:nvCxnSpPr>
+            <p:cNvPr id="20" name="직선 화살표 연결선 19">
               <a:extLst>
                 <a:ext uri="{FF2B5EF4-FFF2-40B4-BE49-F238E27FC236}">
-                  <a16:creationId xmlns:a16="http://schemas.microsoft.com/office/drawing/2014/main" id="{94C7349F-0ADE-F50B-6181-BFA7249EBF2F}"/>
+                  <a16:creationId xmlns:a16="http://schemas.microsoft.com/office/drawing/2014/main" id="{AB01EF0F-2BC8-D62B-A68B-C8B9D4A6716C}"/>
                 </a:ext>
               </a:extLst>
             </p:cNvPr>
-            <p:cNvSpPr/>
+            <p:cNvCxnSpPr>
+              <a:cxnSpLocks/>
+            </p:cNvCxnSpPr>
             <p:nvPr/>
-          </p:nvSpPr>
+          </p:nvCxnSpPr>
           <p:spPr>
-            <a:xfrm flipV="1">
-              <a:off x="6083022" y="3609338"/>
-              <a:ext cx="273761" cy="242829"/>
+            <a:xfrm>
+              <a:off x="10623541" y="3175585"/>
+              <a:ext cx="926953" cy="0"/>
             </a:xfrm>
-            <a:prstGeom prst="rect">
+            <a:prstGeom prst="straightConnector1">
               <a:avLst/>
             </a:prstGeom>
-            <a:noFill/>
             <a:ln>
-              <a:noFill/>
+              <a:tailEnd type="triangle"/>
             </a:ln>
           </p:spPr>
           <p:style>
             <a:lnRef idx="2">
-              <a:schemeClr val="accent1">
-                <a:shade val="15000"/>
-              </a:schemeClr>
+              <a:schemeClr val="accent1"/>
             </a:lnRef>
-            <a:fillRef idx="1">
+            <a:fillRef idx="0">
               <a:schemeClr val="accent1"/>
             </a:fillRef>
-            <a:effectRef idx="0">
+            <a:effectRef idx="1">
               <a:schemeClr val="accent1"/>
             </a:effectRef>
             <a:fontRef idx="minor">
-              <a:schemeClr val="lt1"/>
+              <a:schemeClr val="tx1"/>
             </a:fontRef>
           </p:style>
-          <p:txBody>
-            <a:bodyPr rtlCol="0" anchor="ctr"/>
-            <a:lstStyle/>
-            <a:p>
-              <a:pPr algn="ctr"/>
-              <a:endParaRPr lang="ko-KR" altLang="en-US">
-                <a:noFill/>
-              </a:endParaRPr>
-            </a:p>
-          </p:txBody>
-        </p:sp>
-        <p:sp>
-          <p:nvSpPr>
-            <p:cNvPr id="26" name="직사각형 25">
-              <a:extLst>
-                <a:ext uri="{FF2B5EF4-FFF2-40B4-BE49-F238E27FC236}">
-                  <a16:creationId xmlns:a16="http://schemas.microsoft.com/office/drawing/2014/main" id="{A72F583B-2A62-D8E2-68C2-E59D37355CCA}"/>
-                </a:ext>
-              </a:extLst>
-            </p:cNvPr>
-            <p:cNvSpPr/>
-            <p:nvPr/>
-          </p:nvSpPr>
-          <p:spPr>
-            <a:xfrm flipV="1">
-              <a:off x="6083022" y="5105868"/>
-              <a:ext cx="273761" cy="242829"/>
-            </a:xfrm>
-            <a:prstGeom prst="rect">
-              <a:avLst/>
-            </a:prstGeom>
+        </p:cxnSp>
+      </p:grpSp>
+      <p:sp>
+        <p:nvSpPr>
+          <p:cNvPr id="22" name="직사각형 21">
+            <a:extLst>
+              <a:ext uri="{FF2B5EF4-FFF2-40B4-BE49-F238E27FC236}">
+                <a16:creationId xmlns:a16="http://schemas.microsoft.com/office/drawing/2014/main" id="{ACC4F43D-0F34-11E1-29BF-7268019657EF}"/>
+              </a:ext>
+            </a:extLst>
+          </p:cNvPr>
+          <p:cNvSpPr/>
+          <p:nvPr/>
+        </p:nvSpPr>
+        <p:spPr>
+          <a:xfrm>
+            <a:off x="5504465" y="5004268"/>
+            <a:ext cx="1513301" cy="758941"/>
+          </a:xfrm>
+          <a:prstGeom prst="rect">
+            <a:avLst/>
+          </a:prstGeom>
+          <a:noFill/>
+          <a:ln>
+            <a:solidFill>
+              <a:srgbClr val="A4A4A4"/>
+            </a:solidFill>
+          </a:ln>
+        </p:spPr>
+        <p:style>
+          <a:lnRef idx="2">
+            <a:schemeClr val="accent1">
+              <a:shade val="15000"/>
+            </a:schemeClr>
+          </a:lnRef>
+          <a:fillRef idx="1">
+            <a:schemeClr val="accent1"/>
+          </a:fillRef>
+          <a:effectRef idx="0">
+            <a:schemeClr val="accent1"/>
+          </a:effectRef>
+          <a:fontRef idx="minor">
+            <a:schemeClr val="lt1"/>
+          </a:fontRef>
+        </p:style>
+        <p:txBody>
+          <a:bodyPr rtlCol="0" anchor="ctr"/>
+          <a:lstStyle/>
+          <a:p>
+            <a:pPr algn="ctr"/>
+            <a:endParaRPr lang="ko-KR" altLang="en-US"/>
+          </a:p>
+        </p:txBody>
+      </p:sp>
+      <p:cxnSp>
+        <p:nvCxnSpPr>
+          <p:cNvPr id="24" name="직선 화살표 연결선 23">
+            <a:extLst>
+              <a:ext uri="{FF2B5EF4-FFF2-40B4-BE49-F238E27FC236}">
+                <a16:creationId xmlns:a16="http://schemas.microsoft.com/office/drawing/2014/main" id="{50050C19-C3EA-39E0-62BB-BE0EAF4CDD21}"/>
+              </a:ext>
+            </a:extLst>
+          </p:cNvPr>
+          <p:cNvCxnSpPr>
+            <a:cxnSpLocks/>
+          </p:cNvCxnSpPr>
+          <p:nvPr/>
+        </p:nvCxnSpPr>
+        <p:spPr>
+          <a:xfrm>
+            <a:off x="6261116" y="3750567"/>
+            <a:ext cx="0" cy="1253701"/>
+          </a:xfrm>
+          <a:prstGeom prst="straightConnector1">
+            <a:avLst/>
+          </a:prstGeom>
+          <a:ln>
+            <a:solidFill>
+              <a:srgbClr val="A4A4A4"/>
+            </a:solidFill>
+            <a:tailEnd type="triangle"/>
+          </a:ln>
+        </p:spPr>
+        <p:style>
+          <a:lnRef idx="2">
+            <a:schemeClr val="accent1"/>
+          </a:lnRef>
+          <a:fillRef idx="0">
+            <a:schemeClr val="accent1"/>
+          </a:fillRef>
+          <a:effectRef idx="1">
+            <a:schemeClr val="accent1"/>
+          </a:effectRef>
+          <a:fontRef idx="minor">
+            <a:schemeClr val="tx1"/>
+          </a:fontRef>
+        </p:style>
+      </p:cxnSp>
+      <p:sp>
+        <p:nvSpPr>
+          <p:cNvPr id="25" name="직사각형 24">
+            <a:extLst>
+              <a:ext uri="{FF2B5EF4-FFF2-40B4-BE49-F238E27FC236}">
+                <a16:creationId xmlns:a16="http://schemas.microsoft.com/office/drawing/2014/main" id="{94C7349F-0ADE-F50B-6181-BFA7249EBF2F}"/>
+              </a:ext>
+            </a:extLst>
+          </p:cNvPr>
+          <p:cNvSpPr/>
+          <p:nvPr/>
+        </p:nvSpPr>
+        <p:spPr>
+          <a:xfrm flipV="1">
+            <a:off x="6124235" y="3507738"/>
+            <a:ext cx="273761" cy="242829"/>
+          </a:xfrm>
+          <a:prstGeom prst="rect">
+            <a:avLst/>
+          </a:prstGeom>
+          <a:noFill/>
+          <a:ln>
             <a:noFill/>
-            <a:ln>
+          </a:ln>
+        </p:spPr>
+        <p:style>
+          <a:lnRef idx="2">
+            <a:schemeClr val="accent1">
+              <a:shade val="15000"/>
+            </a:schemeClr>
+          </a:lnRef>
+          <a:fillRef idx="1">
+            <a:schemeClr val="accent1"/>
+          </a:fillRef>
+          <a:effectRef idx="0">
+            <a:schemeClr val="accent1"/>
+          </a:effectRef>
+          <a:fontRef idx="minor">
+            <a:schemeClr val="lt1"/>
+          </a:fontRef>
+        </p:style>
+        <p:txBody>
+          <a:bodyPr rtlCol="0" anchor="ctr"/>
+          <a:lstStyle/>
+          <a:p>
+            <a:pPr algn="ctr"/>
+            <a:endParaRPr lang="ko-KR" altLang="en-US">
               <a:noFill/>
-            </a:ln>
-          </p:spPr>
-          <p:style>
-            <a:lnRef idx="2">
-              <a:schemeClr val="accent1">
-                <a:shade val="15000"/>
-              </a:schemeClr>
-            </a:lnRef>
-            <a:fillRef idx="1">
-              <a:schemeClr val="accent1"/>
-            </a:fillRef>
-            <a:effectRef idx="0">
-              <a:schemeClr val="accent1"/>
-            </a:effectRef>
-            <a:fontRef idx="minor">
-              <a:schemeClr val="lt1"/>
-            </a:fontRef>
-          </p:style>
-          <p:txBody>
-            <a:bodyPr rtlCol="0" anchor="ctr"/>
-            <a:lstStyle/>
-            <a:p>
-              <a:pPr algn="ctr"/>
-              <a:endParaRPr lang="ko-KR" altLang="en-US">
-                <a:noFill/>
-              </a:endParaRPr>
-            </a:p>
-          </p:txBody>
-        </p:sp>
-        <p:sp>
-          <p:nvSpPr>
-            <p:cNvPr id="3" name="TextBox 2">
-              <a:extLst>
-                <a:ext uri="{FF2B5EF4-FFF2-40B4-BE49-F238E27FC236}">
-                  <a16:creationId xmlns:a16="http://schemas.microsoft.com/office/drawing/2014/main" id="{1F04BA77-A9DC-451A-5865-45E543777213}"/>
-                </a:ext>
-              </a:extLst>
-            </p:cNvPr>
-            <p:cNvSpPr txBox="1"/>
-            <p:nvPr/>
-          </p:nvSpPr>
-          <p:spPr>
-            <a:xfrm>
-              <a:off x="5743292" y="5316061"/>
-              <a:ext cx="946093" cy="338554"/>
-            </a:xfrm>
-            <a:prstGeom prst="rect">
-              <a:avLst/>
-            </a:prstGeom>
+            </a:endParaRPr>
+          </a:p>
+        </p:txBody>
+      </p:sp>
+      <p:sp>
+        <p:nvSpPr>
+          <p:cNvPr id="26" name="직사각형 25">
+            <a:extLst>
+              <a:ext uri="{FF2B5EF4-FFF2-40B4-BE49-F238E27FC236}">
+                <a16:creationId xmlns:a16="http://schemas.microsoft.com/office/drawing/2014/main" id="{A72F583B-2A62-D8E2-68C2-E59D37355CCA}"/>
+              </a:ext>
+            </a:extLst>
+          </p:cNvPr>
+          <p:cNvSpPr/>
+          <p:nvPr/>
+        </p:nvSpPr>
+        <p:spPr>
+          <a:xfrm flipV="1">
+            <a:off x="6124235" y="5004268"/>
+            <a:ext cx="273761" cy="242829"/>
+          </a:xfrm>
+          <a:prstGeom prst="rect">
+            <a:avLst/>
+          </a:prstGeom>
+          <a:noFill/>
+          <a:ln>
             <a:noFill/>
-          </p:spPr>
-          <p:txBody>
-            <a:bodyPr wrap="none" rtlCol="0">
-              <a:spAutoFit/>
-            </a:bodyPr>
-            <a:lstStyle/>
-            <a:p>
-              <a:r>
-                <a:rPr lang="en-US" altLang="ko-KR" sz="1600" b="1">
-                  <a:solidFill>
-                    <a:srgbClr val="708A41"/>
-                  </a:solidFill>
-                </a:rPr>
-                <a:t>Domain</a:t>
-              </a:r>
-              <a:endParaRPr lang="ko-KR" altLang="en-US" sz="1600" b="1">
+          </a:ln>
+        </p:spPr>
+        <p:style>
+          <a:lnRef idx="2">
+            <a:schemeClr val="accent1">
+              <a:shade val="15000"/>
+            </a:schemeClr>
+          </a:lnRef>
+          <a:fillRef idx="1">
+            <a:schemeClr val="accent1"/>
+          </a:fillRef>
+          <a:effectRef idx="0">
+            <a:schemeClr val="accent1"/>
+          </a:effectRef>
+          <a:fontRef idx="minor">
+            <a:schemeClr val="lt1"/>
+          </a:fontRef>
+        </p:style>
+        <p:txBody>
+          <a:bodyPr rtlCol="0" anchor="ctr"/>
+          <a:lstStyle/>
+          <a:p>
+            <a:pPr algn="ctr"/>
+            <a:endParaRPr lang="ko-KR" altLang="en-US">
+              <a:noFill/>
+            </a:endParaRPr>
+          </a:p>
+        </p:txBody>
+      </p:sp>
+      <p:sp>
+        <p:nvSpPr>
+          <p:cNvPr id="3" name="TextBox 2">
+            <a:extLst>
+              <a:ext uri="{FF2B5EF4-FFF2-40B4-BE49-F238E27FC236}">
+                <a16:creationId xmlns:a16="http://schemas.microsoft.com/office/drawing/2014/main" id="{1F04BA77-A9DC-451A-5865-45E543777213}"/>
+              </a:ext>
+            </a:extLst>
+          </p:cNvPr>
+          <p:cNvSpPr txBox="1"/>
+          <p:nvPr/>
+        </p:nvSpPr>
+        <p:spPr>
+          <a:xfrm>
+            <a:off x="5784505" y="5214461"/>
+            <a:ext cx="946093" cy="338554"/>
+          </a:xfrm>
+          <a:prstGeom prst="rect">
+            <a:avLst/>
+          </a:prstGeom>
+          <a:noFill/>
+        </p:spPr>
+        <p:txBody>
+          <a:bodyPr wrap="none" rtlCol="0">
+            <a:spAutoFit/>
+          </a:bodyPr>
+          <a:lstStyle/>
+          <a:p>
+            <a:r>
+              <a:rPr lang="en-US" altLang="ko-KR" sz="1600" b="1">
                 <a:solidFill>
                   <a:srgbClr val="708A41"/>
                 </a:solidFill>
-              </a:endParaRPr>
-            </a:p>
-          </p:txBody>
-        </p:sp>
-        <p:sp>
-          <p:nvSpPr>
-            <p:cNvPr id="15" name="TextBox 14">
-              <a:extLst>
-                <a:ext uri="{FF2B5EF4-FFF2-40B4-BE49-F238E27FC236}">
-                  <a16:creationId xmlns:a16="http://schemas.microsoft.com/office/drawing/2014/main" id="{21BA7D44-40A4-4FF1-076B-FAB817DBA8D6}"/>
-                </a:ext>
-              </a:extLst>
-            </p:cNvPr>
-            <p:cNvSpPr txBox="1"/>
-            <p:nvPr/>
-          </p:nvSpPr>
-          <p:spPr>
-            <a:xfrm>
-              <a:off x="1900266" y="832014"/>
-              <a:ext cx="1729641" cy="369332"/>
-            </a:xfrm>
-            <a:prstGeom prst="rect">
-              <a:avLst/>
-            </a:prstGeom>
-            <a:noFill/>
-          </p:spPr>
-          <p:txBody>
-            <a:bodyPr wrap="none" rtlCol="0">
-              <a:spAutoFit/>
-            </a:bodyPr>
-            <a:lstStyle/>
-            <a:p>
-              <a:pPr algn="ctr"/>
-              <a:r>
-                <a:rPr lang="en-US" altLang="ko-KR" b="1">
-                  <a:solidFill>
-                    <a:srgbClr val="0070C0"/>
-                  </a:solidFill>
-                </a:rPr>
-                <a:t>Adapter </a:t>
-              </a:r>
-              <a:r>
-                <a:rPr lang="en-GB" altLang="ko-KR" b="1">
-                  <a:solidFill>
-                    <a:srgbClr val="0070C0"/>
-                  </a:solidFill>
-                </a:rPr>
-                <a:t>Layer</a:t>
-              </a:r>
-              <a:endParaRPr lang="ko-KR" altLang="en-US" b="1">
+              </a:rPr>
+              <a:t>Domain</a:t>
+            </a:r>
+            <a:endParaRPr lang="ko-KR" altLang="en-US" sz="1600" b="1">
+              <a:solidFill>
+                <a:srgbClr val="708A41"/>
+              </a:solidFill>
+            </a:endParaRPr>
+          </a:p>
+        </p:txBody>
+      </p:sp>
+      <p:sp>
+        <p:nvSpPr>
+          <p:cNvPr id="15" name="TextBox 14">
+            <a:extLst>
+              <a:ext uri="{FF2B5EF4-FFF2-40B4-BE49-F238E27FC236}">
+                <a16:creationId xmlns:a16="http://schemas.microsoft.com/office/drawing/2014/main" id="{21BA7D44-40A4-4FF1-076B-FAB817DBA8D6}"/>
+              </a:ext>
+            </a:extLst>
+          </p:cNvPr>
+          <p:cNvSpPr txBox="1"/>
+          <p:nvPr/>
+        </p:nvSpPr>
+        <p:spPr>
+          <a:xfrm>
+            <a:off x="1941479" y="730414"/>
+            <a:ext cx="1729641" cy="369332"/>
+          </a:xfrm>
+          <a:prstGeom prst="rect">
+            <a:avLst/>
+          </a:prstGeom>
+          <a:noFill/>
+        </p:spPr>
+        <p:txBody>
+          <a:bodyPr wrap="none" rtlCol="0">
+            <a:spAutoFit/>
+          </a:bodyPr>
+          <a:lstStyle/>
+          <a:p>
+            <a:pPr algn="ctr"/>
+            <a:r>
+              <a:rPr lang="en-US" altLang="ko-KR" b="1">
                 <a:solidFill>
                   <a:srgbClr val="0070C0"/>
                 </a:solidFill>
-              </a:endParaRPr>
-            </a:p>
-          </p:txBody>
-        </p:sp>
-        <p:sp>
-          <p:nvSpPr>
-            <p:cNvPr id="16" name="TextBox 15">
-              <a:extLst>
-                <a:ext uri="{FF2B5EF4-FFF2-40B4-BE49-F238E27FC236}">
-                  <a16:creationId xmlns:a16="http://schemas.microsoft.com/office/drawing/2014/main" id="{B70FF85F-1DCF-3092-3BEE-CCB69012E2A4}"/>
-                </a:ext>
-              </a:extLst>
-            </p:cNvPr>
-            <p:cNvSpPr txBox="1"/>
-            <p:nvPr/>
-          </p:nvSpPr>
-          <p:spPr>
-            <a:xfrm>
-              <a:off x="8953966" y="832014"/>
-              <a:ext cx="1729641" cy="369332"/>
-            </a:xfrm>
-            <a:prstGeom prst="rect">
-              <a:avLst/>
-            </a:prstGeom>
-            <a:noFill/>
-          </p:spPr>
-          <p:txBody>
-            <a:bodyPr wrap="none" rtlCol="0">
-              <a:spAutoFit/>
-            </a:bodyPr>
-            <a:lstStyle/>
-            <a:p>
-              <a:pPr algn="ctr"/>
-              <a:r>
-                <a:rPr lang="en-US" altLang="ko-KR" b="1">
-                  <a:solidFill>
-                    <a:srgbClr val="0070C0"/>
-                  </a:solidFill>
-                </a:rPr>
-                <a:t>Adapter </a:t>
-              </a:r>
-              <a:r>
-                <a:rPr lang="en-GB" altLang="ko-KR" b="1">
-                  <a:solidFill>
-                    <a:srgbClr val="0070C0"/>
-                  </a:solidFill>
-                </a:rPr>
-                <a:t>Layer</a:t>
-              </a:r>
-              <a:endParaRPr lang="ko-KR" altLang="en-US" b="1">
+              </a:rPr>
+              <a:t>Adapter </a:t>
+            </a:r>
+            <a:r>
+              <a:rPr lang="en-GB" altLang="ko-KR" b="1">
                 <a:solidFill>
                   <a:srgbClr val="0070C0"/>
                 </a:solidFill>
-              </a:endParaRPr>
-            </a:p>
-          </p:txBody>
-        </p:sp>
-        <p:sp>
-          <p:nvSpPr>
-            <p:cNvPr id="17" name="TextBox 16">
-              <a:extLst>
-                <a:ext uri="{FF2B5EF4-FFF2-40B4-BE49-F238E27FC236}">
-                  <a16:creationId xmlns:a16="http://schemas.microsoft.com/office/drawing/2014/main" id="{9952731A-141A-9D37-6B5E-500A9C271733}"/>
-                </a:ext>
-              </a:extLst>
-            </p:cNvPr>
-            <p:cNvSpPr txBox="1"/>
-            <p:nvPr/>
-          </p:nvSpPr>
-          <p:spPr>
-            <a:xfrm>
-              <a:off x="5191561" y="832014"/>
-              <a:ext cx="2100960" cy="369332"/>
-            </a:xfrm>
-            <a:prstGeom prst="rect">
-              <a:avLst/>
-            </a:prstGeom>
-            <a:noFill/>
-          </p:spPr>
-          <p:txBody>
-            <a:bodyPr wrap="none" rtlCol="0">
-              <a:spAutoFit/>
-            </a:bodyPr>
-            <a:lstStyle/>
-            <a:p>
-              <a:r>
-                <a:rPr lang="en-US" altLang="ko-KR" b="1">
-                  <a:solidFill>
-                    <a:srgbClr val="0070C0"/>
-                  </a:solidFill>
-                </a:rPr>
-                <a:t>Application </a:t>
-              </a:r>
-              <a:r>
-                <a:rPr lang="en-GB" altLang="ko-KR" b="1">
-                  <a:solidFill>
-                    <a:srgbClr val="0070C0"/>
-                  </a:solidFill>
-                </a:rPr>
-                <a:t>Layer</a:t>
-              </a:r>
-              <a:endParaRPr lang="ko-KR" altLang="en-US" b="1">
+              </a:rPr>
+              <a:t>Layer</a:t>
+            </a:r>
+            <a:endParaRPr lang="ko-KR" altLang="en-US" b="1">
+              <a:solidFill>
+                <a:srgbClr val="0070C0"/>
+              </a:solidFill>
+            </a:endParaRPr>
+          </a:p>
+        </p:txBody>
+      </p:sp>
+      <p:sp>
+        <p:nvSpPr>
+          <p:cNvPr id="16" name="TextBox 15">
+            <a:extLst>
+              <a:ext uri="{FF2B5EF4-FFF2-40B4-BE49-F238E27FC236}">
+                <a16:creationId xmlns:a16="http://schemas.microsoft.com/office/drawing/2014/main" id="{B70FF85F-1DCF-3092-3BEE-CCB69012E2A4}"/>
+              </a:ext>
+            </a:extLst>
+          </p:cNvPr>
+          <p:cNvSpPr txBox="1"/>
+          <p:nvPr/>
+        </p:nvSpPr>
+        <p:spPr>
+          <a:xfrm>
+            <a:off x="8995179" y="730414"/>
+            <a:ext cx="1729641" cy="369332"/>
+          </a:xfrm>
+          <a:prstGeom prst="rect">
+            <a:avLst/>
+          </a:prstGeom>
+          <a:noFill/>
+        </p:spPr>
+        <p:txBody>
+          <a:bodyPr wrap="none" rtlCol="0">
+            <a:spAutoFit/>
+          </a:bodyPr>
+          <a:lstStyle/>
+          <a:p>
+            <a:pPr algn="ctr"/>
+            <a:r>
+              <a:rPr lang="en-US" altLang="ko-KR" b="1">
                 <a:solidFill>
                   <a:srgbClr val="0070C0"/>
                 </a:solidFill>
-              </a:endParaRPr>
-            </a:p>
-          </p:txBody>
-        </p:sp>
-        <p:sp>
-          <p:nvSpPr>
-            <p:cNvPr id="18" name="직사각형 17">
-              <a:extLst>
-                <a:ext uri="{FF2B5EF4-FFF2-40B4-BE49-F238E27FC236}">
-                  <a16:creationId xmlns:a16="http://schemas.microsoft.com/office/drawing/2014/main" id="{639DF5E5-63D7-BCEB-0A06-9B2AED5A5CE3}"/>
-                </a:ext>
-              </a:extLst>
-            </p:cNvPr>
-            <p:cNvSpPr/>
-            <p:nvPr/>
-          </p:nvSpPr>
-          <p:spPr>
-            <a:xfrm>
-              <a:off x="4798122" y="5938916"/>
-              <a:ext cx="2900515" cy="758941"/>
-            </a:xfrm>
-            <a:prstGeom prst="rect">
-              <a:avLst/>
-            </a:prstGeom>
+              </a:rPr>
+              <a:t>Adapter </a:t>
+            </a:r>
+            <a:r>
+              <a:rPr lang="en-GB" altLang="ko-KR" b="1">
+                <a:solidFill>
+                  <a:srgbClr val="0070C0"/>
+                </a:solidFill>
+              </a:rPr>
+              <a:t>Layer</a:t>
+            </a:r>
+            <a:endParaRPr lang="ko-KR" altLang="en-US" b="1">
+              <a:solidFill>
+                <a:srgbClr val="0070C0"/>
+              </a:solidFill>
+            </a:endParaRPr>
+          </a:p>
+        </p:txBody>
+      </p:sp>
+      <p:sp>
+        <p:nvSpPr>
+          <p:cNvPr id="17" name="TextBox 16">
+            <a:extLst>
+              <a:ext uri="{FF2B5EF4-FFF2-40B4-BE49-F238E27FC236}">
+                <a16:creationId xmlns:a16="http://schemas.microsoft.com/office/drawing/2014/main" id="{9952731A-141A-9D37-6B5E-500A9C271733}"/>
+              </a:ext>
+            </a:extLst>
+          </p:cNvPr>
+          <p:cNvSpPr txBox="1"/>
+          <p:nvPr/>
+        </p:nvSpPr>
+        <p:spPr>
+          <a:xfrm>
+            <a:off x="5232774" y="730414"/>
+            <a:ext cx="2100960" cy="369332"/>
+          </a:xfrm>
+          <a:prstGeom prst="rect">
+            <a:avLst/>
+          </a:prstGeom>
+          <a:noFill/>
+        </p:spPr>
+        <p:txBody>
+          <a:bodyPr wrap="none" rtlCol="0">
+            <a:spAutoFit/>
+          </a:bodyPr>
+          <a:lstStyle/>
+          <a:p>
+            <a:r>
+              <a:rPr lang="en-US" altLang="ko-KR" b="1">
+                <a:solidFill>
+                  <a:srgbClr val="0070C0"/>
+                </a:solidFill>
+              </a:rPr>
+              <a:t>Application </a:t>
+            </a:r>
+            <a:r>
+              <a:rPr lang="en-GB" altLang="ko-KR" b="1">
+                <a:solidFill>
+                  <a:srgbClr val="0070C0"/>
+                </a:solidFill>
+              </a:rPr>
+              <a:t>Layer</a:t>
+            </a:r>
+            <a:endParaRPr lang="ko-KR" altLang="en-US" b="1">
+              <a:solidFill>
+                <a:srgbClr val="0070C0"/>
+              </a:solidFill>
+            </a:endParaRPr>
+          </a:p>
+        </p:txBody>
+      </p:sp>
+      <p:sp>
+        <p:nvSpPr>
+          <p:cNvPr id="18" name="직사각형 17">
+            <a:extLst>
+              <a:ext uri="{FF2B5EF4-FFF2-40B4-BE49-F238E27FC236}">
+                <a16:creationId xmlns:a16="http://schemas.microsoft.com/office/drawing/2014/main" id="{639DF5E5-63D7-BCEB-0A06-9B2AED5A5CE3}"/>
+              </a:ext>
+            </a:extLst>
+          </p:cNvPr>
+          <p:cNvSpPr/>
+          <p:nvPr/>
+        </p:nvSpPr>
+        <p:spPr>
+          <a:xfrm>
+            <a:off x="4839335" y="5837316"/>
+            <a:ext cx="2900515" cy="877284"/>
+          </a:xfrm>
+          <a:prstGeom prst="rect">
+            <a:avLst/>
+          </a:prstGeom>
+          <a:solidFill>
+            <a:schemeClr val="bg1"/>
+          </a:solidFill>
+          <a:ln>
             <a:solidFill>
               <a:schemeClr val="bg1"/>
             </a:solidFill>
-            <a:ln>
+          </a:ln>
+        </p:spPr>
+        <p:style>
+          <a:lnRef idx="2">
+            <a:schemeClr val="accent1">
+              <a:shade val="15000"/>
+            </a:schemeClr>
+          </a:lnRef>
+          <a:fillRef idx="1">
+            <a:schemeClr val="accent1"/>
+          </a:fillRef>
+          <a:effectRef idx="0">
+            <a:schemeClr val="accent1"/>
+          </a:effectRef>
+          <a:fontRef idx="minor">
+            <a:schemeClr val="lt1"/>
+          </a:fontRef>
+        </p:style>
+        <p:txBody>
+          <a:bodyPr rtlCol="0" anchor="ctr"/>
+          <a:lstStyle/>
+          <a:p>
+            <a:pPr algn="ctr"/>
+            <a:endParaRPr lang="ko-KR" altLang="en-US">
+              <a:ln>
+                <a:solidFill>
+                  <a:schemeClr val="bg1"/>
+                </a:solidFill>
+              </a:ln>
               <a:solidFill>
                 <a:schemeClr val="bg1"/>
               </a:solidFill>
-            </a:ln>
-          </p:spPr>
-          <p:style>
-            <a:lnRef idx="2">
-              <a:schemeClr val="accent1">
-                <a:shade val="15000"/>
-              </a:schemeClr>
-            </a:lnRef>
-            <a:fillRef idx="1">
-              <a:schemeClr val="accent1"/>
-            </a:fillRef>
-            <a:effectRef idx="0">
-              <a:schemeClr val="accent1"/>
-            </a:effectRef>
-            <a:fontRef idx="minor">
-              <a:schemeClr val="lt1"/>
-            </a:fontRef>
-          </p:style>
-          <p:txBody>
-            <a:bodyPr rtlCol="0" anchor="ctr"/>
-            <a:lstStyle/>
-            <a:p>
-              <a:pPr algn="ctr"/>
-              <a:endParaRPr lang="ko-KR" altLang="en-US">
-                <a:ln>
-                  <a:solidFill>
-                    <a:schemeClr val="bg1"/>
-                  </a:solidFill>
-                </a:ln>
-                <a:solidFill>
-                  <a:schemeClr val="bg1"/>
-                </a:solidFill>
-              </a:endParaRPr>
-            </a:p>
-          </p:txBody>
-        </p:sp>
-        <p:sp>
-          <p:nvSpPr>
-            <p:cNvPr id="27" name="TextBox 26">
-              <a:extLst>
-                <a:ext uri="{FF2B5EF4-FFF2-40B4-BE49-F238E27FC236}">
-                  <a16:creationId xmlns:a16="http://schemas.microsoft.com/office/drawing/2014/main" id="{972F4548-4A68-0146-5537-F64E0CED593D}"/>
-                </a:ext>
-              </a:extLst>
-            </p:cNvPr>
-            <p:cNvSpPr txBox="1"/>
-            <p:nvPr/>
-          </p:nvSpPr>
-          <p:spPr>
-            <a:xfrm>
-              <a:off x="5388728" y="6024184"/>
-              <a:ext cx="1706621" cy="369332"/>
-            </a:xfrm>
-            <a:prstGeom prst="rect">
-              <a:avLst/>
-            </a:prstGeom>
-            <a:noFill/>
-          </p:spPr>
-          <p:txBody>
-            <a:bodyPr wrap="none" rtlCol="0">
-              <a:spAutoFit/>
-            </a:bodyPr>
-            <a:lstStyle/>
-            <a:p>
-              <a:r>
-                <a:rPr lang="en-US" altLang="ko-KR" b="1">
-                  <a:solidFill>
-                    <a:srgbClr val="0070C0"/>
-                  </a:solidFill>
-                </a:rPr>
-                <a:t>Domain </a:t>
-              </a:r>
-              <a:r>
-                <a:rPr lang="en-GB" altLang="ko-KR" b="1">
-                  <a:solidFill>
-                    <a:srgbClr val="0070C0"/>
-                  </a:solidFill>
-                </a:rPr>
-                <a:t>Layer</a:t>
-              </a:r>
-              <a:endParaRPr lang="ko-KR" altLang="en-US" b="1">
+            </a:endParaRPr>
+          </a:p>
+        </p:txBody>
+      </p:sp>
+      <p:sp>
+        <p:nvSpPr>
+          <p:cNvPr id="27" name="TextBox 26">
+            <a:extLst>
+              <a:ext uri="{FF2B5EF4-FFF2-40B4-BE49-F238E27FC236}">
+                <a16:creationId xmlns:a16="http://schemas.microsoft.com/office/drawing/2014/main" id="{972F4548-4A68-0146-5537-F64E0CED593D}"/>
+              </a:ext>
+            </a:extLst>
+          </p:cNvPr>
+          <p:cNvSpPr txBox="1"/>
+          <p:nvPr/>
+        </p:nvSpPr>
+        <p:spPr>
+          <a:xfrm>
+            <a:off x="5429941" y="5922584"/>
+            <a:ext cx="1706621" cy="369332"/>
+          </a:xfrm>
+          <a:prstGeom prst="rect">
+            <a:avLst/>
+          </a:prstGeom>
+          <a:noFill/>
+        </p:spPr>
+        <p:txBody>
+          <a:bodyPr wrap="none" rtlCol="0">
+            <a:spAutoFit/>
+          </a:bodyPr>
+          <a:lstStyle/>
+          <a:p>
+            <a:r>
+              <a:rPr lang="en-US" altLang="ko-KR" b="1">
                 <a:solidFill>
                   <a:srgbClr val="0070C0"/>
                 </a:solidFill>
-              </a:endParaRPr>
-            </a:p>
-          </p:txBody>
-        </p:sp>
-        <p:sp>
-          <p:nvSpPr>
-            <p:cNvPr id="2" name="TextBox 1">
-              <a:extLst>
-                <a:ext uri="{FF2B5EF4-FFF2-40B4-BE49-F238E27FC236}">
-                  <a16:creationId xmlns:a16="http://schemas.microsoft.com/office/drawing/2014/main" id="{A2AF5DAC-1D8A-8079-D419-A70FED8449DF}"/>
-                </a:ext>
-              </a:extLst>
-            </p:cNvPr>
-            <p:cNvSpPr txBox="1"/>
-            <p:nvPr/>
-          </p:nvSpPr>
-          <p:spPr>
-            <a:xfrm>
-              <a:off x="4501988" y="4300606"/>
-              <a:ext cx="1661993" cy="610616"/>
-            </a:xfrm>
-            <a:prstGeom prst="rect">
-              <a:avLst/>
-            </a:prstGeom>
-            <a:noFill/>
-          </p:spPr>
-          <p:txBody>
-            <a:bodyPr wrap="none" rtlCol="0">
-              <a:spAutoFit/>
-            </a:bodyPr>
-            <a:lstStyle/>
-            <a:p>
-              <a:pPr algn="r">
-                <a:lnSpc>
-                  <a:spcPct val="150000"/>
-                </a:lnSpc>
-              </a:pPr>
-              <a:r>
-                <a:rPr lang="en-US" altLang="ko-KR" sz="1200" b="1">
-                  <a:solidFill>
-                    <a:srgbClr val="C00000"/>
-                  </a:solidFill>
-                </a:rPr>
-                <a:t>Fin&lt;T&gt;</a:t>
-              </a:r>
-            </a:p>
-            <a:p>
-              <a:pPr algn="r">
-                <a:lnSpc>
-                  <a:spcPct val="150000"/>
-                </a:lnSpc>
-              </a:pPr>
-              <a:r>
-                <a:rPr lang="en-US" altLang="ko-KR" sz="1200" b="1">
-                  <a:solidFill>
-                    <a:srgbClr val="C00000"/>
-                  </a:solidFill>
-                </a:rPr>
-                <a:t>Validation&lt;Error,</a:t>
-              </a:r>
-              <a:r>
-                <a:rPr lang="ko-KR" altLang="en-US" sz="1200" b="1">
-                  <a:solidFill>
-                    <a:srgbClr val="C00000"/>
-                  </a:solidFill>
-                </a:rPr>
-                <a:t> </a:t>
-              </a:r>
-              <a:r>
-                <a:rPr lang="en-US" altLang="ko-KR" sz="1200" b="1">
-                  <a:solidFill>
-                    <a:srgbClr val="C00000"/>
-                  </a:solidFill>
-                </a:rPr>
-                <a:t>T&gt;</a:t>
-              </a:r>
-              <a:endParaRPr lang="ko-KR" altLang="en-US" sz="1200" b="1">
+              </a:rPr>
+              <a:t>Domain </a:t>
+            </a:r>
+            <a:r>
+              <a:rPr lang="en-GB" altLang="ko-KR" b="1">
+                <a:solidFill>
+                  <a:srgbClr val="0070C0"/>
+                </a:solidFill>
+              </a:rPr>
+              <a:t>Layer</a:t>
+            </a:r>
+            <a:endParaRPr lang="ko-KR" altLang="en-US" b="1">
+              <a:solidFill>
+                <a:srgbClr val="0070C0"/>
+              </a:solidFill>
+            </a:endParaRPr>
+          </a:p>
+        </p:txBody>
+      </p:sp>
+      <p:sp>
+        <p:nvSpPr>
+          <p:cNvPr id="2" name="TextBox 1">
+            <a:extLst>
+              <a:ext uri="{FF2B5EF4-FFF2-40B4-BE49-F238E27FC236}">
+                <a16:creationId xmlns:a16="http://schemas.microsoft.com/office/drawing/2014/main" id="{A2AF5DAC-1D8A-8079-D419-A70FED8449DF}"/>
+              </a:ext>
+            </a:extLst>
+          </p:cNvPr>
+          <p:cNvSpPr txBox="1"/>
+          <p:nvPr/>
+        </p:nvSpPr>
+        <p:spPr>
+          <a:xfrm>
+            <a:off x="4543201" y="4199006"/>
+            <a:ext cx="1661993" cy="610616"/>
+          </a:xfrm>
+          <a:prstGeom prst="rect">
+            <a:avLst/>
+          </a:prstGeom>
+          <a:noFill/>
+        </p:spPr>
+        <p:txBody>
+          <a:bodyPr wrap="none" rtlCol="0">
+            <a:spAutoFit/>
+          </a:bodyPr>
+          <a:lstStyle/>
+          <a:p>
+            <a:pPr algn="r">
+              <a:lnSpc>
+                <a:spcPct val="150000"/>
+              </a:lnSpc>
+            </a:pPr>
+            <a:r>
+              <a:rPr lang="en-US" altLang="ko-KR" sz="1200" b="1">
                 <a:solidFill>
                   <a:srgbClr val="C00000"/>
                 </a:solidFill>
-              </a:endParaRPr>
-            </a:p>
-          </p:txBody>
-        </p:sp>
-        <p:sp>
-          <p:nvSpPr>
-            <p:cNvPr id="21" name="TextBox 20">
-              <a:extLst>
-                <a:ext uri="{FF2B5EF4-FFF2-40B4-BE49-F238E27FC236}">
-                  <a16:creationId xmlns:a16="http://schemas.microsoft.com/office/drawing/2014/main" id="{6F272F85-8FF6-7BD5-CA23-51888AB3F256}"/>
-                </a:ext>
-              </a:extLst>
-            </p:cNvPr>
-            <p:cNvSpPr txBox="1"/>
-            <p:nvPr/>
-          </p:nvSpPr>
-          <p:spPr>
-            <a:xfrm>
-              <a:off x="8805441" y="1989630"/>
-              <a:ext cx="2485937" cy="887615"/>
-            </a:xfrm>
-            <a:prstGeom prst="rect">
-              <a:avLst/>
-            </a:prstGeom>
-            <a:noFill/>
-          </p:spPr>
-          <p:txBody>
-            <a:bodyPr wrap="none" rtlCol="0">
-              <a:spAutoFit/>
-            </a:bodyPr>
-            <a:lstStyle/>
-            <a:p>
-              <a:pPr>
-                <a:lnSpc>
-                  <a:spcPct val="150000"/>
-                </a:lnSpc>
-              </a:pPr>
-              <a:r>
-                <a:rPr lang="en-US" altLang="ko-KR" sz="1200" b="1">
-                  <a:solidFill>
-                    <a:srgbClr val="C00000"/>
-                  </a:solidFill>
-                </a:rPr>
-                <a:t>IAdatper</a:t>
-              </a:r>
-            </a:p>
-            <a:p>
-              <a:pPr>
-                <a:lnSpc>
-                  <a:spcPct val="150000"/>
-                </a:lnSpc>
-              </a:pPr>
-              <a:r>
-                <a:rPr lang="en-US" altLang="ko-KR" sz="1200" b="1">
-                  <a:solidFill>
-                    <a:srgbClr val="C00000"/>
-                  </a:solidFill>
-                </a:rPr>
-                <a:t>Observability Source Generator</a:t>
-              </a:r>
-            </a:p>
-            <a:p>
-              <a:pPr>
-                <a:lnSpc>
-                  <a:spcPct val="150000"/>
-                </a:lnSpc>
-              </a:pPr>
-              <a:r>
-                <a:rPr lang="en-US" altLang="ko-KR" sz="1200" b="1">
-                  <a:solidFill>
-                    <a:srgbClr val="C00000"/>
-                  </a:solidFill>
-                </a:rPr>
-                <a:t>FinT&lt;IO, T&gt;</a:t>
-              </a:r>
-              <a:endParaRPr lang="ko-KR" altLang="en-US" sz="1200" b="1">
+              </a:rPr>
+              <a:t>Fin&lt;T&gt;</a:t>
+            </a:r>
+          </a:p>
+          <a:p>
+            <a:pPr algn="r">
+              <a:lnSpc>
+                <a:spcPct val="150000"/>
+              </a:lnSpc>
+            </a:pPr>
+            <a:r>
+              <a:rPr lang="en-US" altLang="ko-KR" sz="1200" b="1">
                 <a:solidFill>
                   <a:srgbClr val="C00000"/>
                 </a:solidFill>
-              </a:endParaRPr>
-            </a:p>
-          </p:txBody>
-        </p:sp>
-        <p:sp>
-          <p:nvSpPr>
-            <p:cNvPr id="23" name="TextBox 22">
-              <a:extLst>
-                <a:ext uri="{FF2B5EF4-FFF2-40B4-BE49-F238E27FC236}">
-                  <a16:creationId xmlns:a16="http://schemas.microsoft.com/office/drawing/2014/main" id="{679DD95D-4D18-DA4D-6926-65A9CEA63EE4}"/>
-                </a:ext>
-              </a:extLst>
-            </p:cNvPr>
-            <p:cNvSpPr txBox="1"/>
-            <p:nvPr/>
-          </p:nvSpPr>
-          <p:spPr>
-            <a:xfrm>
-              <a:off x="4699196" y="1297132"/>
-              <a:ext cx="4398961" cy="1580113"/>
-            </a:xfrm>
-            <a:prstGeom prst="rect">
-              <a:avLst/>
-            </a:prstGeom>
-            <a:noFill/>
-          </p:spPr>
-          <p:txBody>
-            <a:bodyPr wrap="none" rtlCol="0">
-              <a:spAutoFit/>
-            </a:bodyPr>
-            <a:lstStyle/>
-            <a:p>
-              <a:pPr>
-                <a:lnSpc>
-                  <a:spcPct val="150000"/>
-                </a:lnSpc>
-              </a:pPr>
-              <a:r>
-                <a:rPr lang="en-US" altLang="ko-KR" sz="1200" b="1">
-                  <a:solidFill>
-                    <a:srgbClr val="C00000"/>
-                  </a:solidFill>
-                </a:rPr>
-                <a:t>CQRS</a:t>
-              </a:r>
-            </a:p>
-            <a:p>
-              <a:pPr marL="266700" lvl="1" indent="-179388">
-                <a:lnSpc>
-                  <a:spcPct val="150000"/>
-                </a:lnSpc>
-                <a:buFontTx/>
-                <a:buChar char="-"/>
-              </a:pPr>
-              <a:r>
-                <a:rPr lang="en-US" altLang="ko-KR" sz="1000">
-                  <a:solidFill>
-                    <a:srgbClr val="C00000"/>
-                  </a:solidFill>
-                </a:rPr>
-                <a:t>ICommandRequest&lt;TInput&gt;, ICommandUsecase&lt;TInput, TOutput&gt;</a:t>
-              </a:r>
-            </a:p>
-            <a:p>
-              <a:pPr marL="266700" lvl="1" indent="-179388">
-                <a:lnSpc>
-                  <a:spcPct val="150000"/>
-                </a:lnSpc>
-                <a:buFontTx/>
-                <a:buChar char="-"/>
-              </a:pPr>
-              <a:r>
-                <a:rPr lang="en-US" altLang="ko-KR" sz="1000">
-                  <a:solidFill>
-                    <a:srgbClr val="C00000"/>
-                  </a:solidFill>
-                </a:rPr>
-                <a:t>IQueryRequest&lt;TInput&gt;, IQueryUsecase&lt;TInput, TOutput&gt;</a:t>
-              </a:r>
-            </a:p>
-            <a:p>
-              <a:pPr marL="266700" lvl="1" indent="-179388">
-                <a:lnSpc>
-                  <a:spcPct val="150000"/>
-                </a:lnSpc>
-                <a:buFontTx/>
-                <a:buChar char="-"/>
-              </a:pPr>
-              <a:r>
-                <a:rPr lang="en-US" altLang="ko-KR" sz="1000">
-                  <a:solidFill>
-                    <a:srgbClr val="C00000"/>
-                  </a:solidFill>
-                </a:rPr>
-                <a:t>IFinResponse&lt;T&gt;</a:t>
-              </a:r>
-            </a:p>
-            <a:p>
-              <a:pPr>
-                <a:lnSpc>
-                  <a:spcPct val="150000"/>
-                </a:lnSpc>
-              </a:pPr>
-              <a:r>
-                <a:rPr lang="en-US" altLang="ko-KR" sz="1200" b="1">
-                  <a:solidFill>
-                    <a:srgbClr val="C00000"/>
-                  </a:solidFill>
-                </a:rPr>
-                <a:t>Observability CQRS Pipeline</a:t>
-              </a:r>
-            </a:p>
-            <a:p>
-              <a:pPr>
-                <a:lnSpc>
-                  <a:spcPct val="150000"/>
-                </a:lnSpc>
-              </a:pPr>
-              <a:r>
-                <a:rPr lang="en-US" altLang="ko-KR" sz="1200" b="1">
-                  <a:solidFill>
-                    <a:srgbClr val="C00000"/>
-                  </a:solidFill>
-                </a:rPr>
-                <a:t>FinT&lt;IO, T&gt; LINQ</a:t>
-              </a:r>
-              <a:endParaRPr lang="ko-KR" altLang="en-US" sz="1200" b="1">
+              </a:rPr>
+              <a:t>Validation&lt;Error,</a:t>
+            </a:r>
+            <a:r>
+              <a:rPr lang="ko-KR" altLang="en-US" sz="1200" b="1">
                 <a:solidFill>
                   <a:srgbClr val="C00000"/>
                 </a:solidFill>
-              </a:endParaRPr>
-            </a:p>
-          </p:txBody>
-        </p:sp>
-        <p:sp>
-          <p:nvSpPr>
-            <p:cNvPr id="4" name="TextBox 3">
-              <a:extLst>
-                <a:ext uri="{FF2B5EF4-FFF2-40B4-BE49-F238E27FC236}">
-                  <a16:creationId xmlns:a16="http://schemas.microsoft.com/office/drawing/2014/main" id="{1E3D7D7A-1D31-989F-F1E5-577234CA5FE4}"/>
-                </a:ext>
-              </a:extLst>
-            </p:cNvPr>
-            <p:cNvSpPr txBox="1"/>
-            <p:nvPr/>
-          </p:nvSpPr>
-          <p:spPr>
-            <a:xfrm>
-              <a:off x="1796642" y="1643381"/>
-              <a:ext cx="2027093" cy="887615"/>
-            </a:xfrm>
-            <a:prstGeom prst="rect">
-              <a:avLst/>
-            </a:prstGeom>
-            <a:noFill/>
-          </p:spPr>
-          <p:txBody>
-            <a:bodyPr wrap="none" rtlCol="0">
-              <a:spAutoFit/>
-            </a:bodyPr>
-            <a:lstStyle/>
-            <a:p>
-              <a:pPr>
-                <a:lnSpc>
-                  <a:spcPct val="150000"/>
-                </a:lnSpc>
-              </a:pPr>
-              <a:r>
-                <a:rPr lang="en-US" altLang="ko-KR" sz="1200" b="1">
-                  <a:solidFill>
-                    <a:srgbClr val="C00000"/>
-                  </a:solidFill>
-                </a:rPr>
-                <a:t>Structured Error</a:t>
-              </a:r>
-              <a:endParaRPr lang="en-GB" altLang="ko-KR" sz="1200" b="1">
+              </a:rPr>
+              <a:t> </a:t>
+            </a:r>
+            <a:r>
+              <a:rPr lang="en-US" altLang="ko-KR" sz="1200" b="1">
                 <a:solidFill>
                   <a:srgbClr val="C00000"/>
                 </a:solidFill>
-              </a:endParaRPr>
-            </a:p>
-            <a:p>
-              <a:pPr>
-                <a:lnSpc>
-                  <a:spcPct val="150000"/>
-                </a:lnSpc>
-              </a:pPr>
-              <a:r>
-                <a:rPr lang="en-US" altLang="ko-KR" sz="1200" b="1">
-                  <a:solidFill>
-                    <a:srgbClr val="C00000"/>
-                  </a:solidFill>
-                </a:rPr>
-                <a:t>Observability Pipeline</a:t>
-              </a:r>
-            </a:p>
-            <a:p>
-              <a:pPr>
-                <a:lnSpc>
-                  <a:spcPct val="150000"/>
-                </a:lnSpc>
-              </a:pPr>
-              <a:r>
-                <a:rPr lang="en-US" altLang="ko-KR" sz="1200" b="1">
-                  <a:solidFill>
-                    <a:srgbClr val="C00000"/>
-                  </a:solidFill>
-                </a:rPr>
-                <a:t>Dependency Registration</a:t>
-              </a:r>
-            </a:p>
-          </p:txBody>
-        </p:sp>
-      </p:grpSp>
+              </a:rPr>
+              <a:t>T&gt;</a:t>
+            </a:r>
+            <a:endParaRPr lang="ko-KR" altLang="en-US" sz="1200" b="1">
+              <a:solidFill>
+                <a:srgbClr val="C00000"/>
+              </a:solidFill>
+            </a:endParaRPr>
+          </a:p>
+        </p:txBody>
+      </p:sp>
+      <p:sp>
+        <p:nvSpPr>
+          <p:cNvPr id="21" name="TextBox 20">
+            <a:extLst>
+              <a:ext uri="{FF2B5EF4-FFF2-40B4-BE49-F238E27FC236}">
+                <a16:creationId xmlns:a16="http://schemas.microsoft.com/office/drawing/2014/main" id="{6F272F85-8FF6-7BD5-CA23-51888AB3F256}"/>
+              </a:ext>
+            </a:extLst>
+          </p:cNvPr>
+          <p:cNvSpPr txBox="1"/>
+          <p:nvPr/>
+        </p:nvSpPr>
+        <p:spPr>
+          <a:xfrm>
+            <a:off x="8846654" y="1888030"/>
+            <a:ext cx="2485937" cy="887615"/>
+          </a:xfrm>
+          <a:prstGeom prst="rect">
+            <a:avLst/>
+          </a:prstGeom>
+          <a:noFill/>
+        </p:spPr>
+        <p:txBody>
+          <a:bodyPr wrap="none" rtlCol="0">
+            <a:spAutoFit/>
+          </a:bodyPr>
+          <a:lstStyle/>
+          <a:p>
+            <a:pPr>
+              <a:lnSpc>
+                <a:spcPct val="150000"/>
+              </a:lnSpc>
+            </a:pPr>
+            <a:r>
+              <a:rPr lang="en-US" altLang="ko-KR" sz="1200" b="1">
+                <a:solidFill>
+                  <a:srgbClr val="C00000"/>
+                </a:solidFill>
+              </a:rPr>
+              <a:t>IAdatper</a:t>
+            </a:r>
+          </a:p>
+          <a:p>
+            <a:pPr>
+              <a:lnSpc>
+                <a:spcPct val="150000"/>
+              </a:lnSpc>
+            </a:pPr>
+            <a:r>
+              <a:rPr lang="en-US" altLang="ko-KR" sz="1200" b="1">
+                <a:solidFill>
+                  <a:srgbClr val="C00000"/>
+                </a:solidFill>
+              </a:rPr>
+              <a:t>Observability Source Generator</a:t>
+            </a:r>
+          </a:p>
+          <a:p>
+            <a:pPr>
+              <a:lnSpc>
+                <a:spcPct val="150000"/>
+              </a:lnSpc>
+            </a:pPr>
+            <a:r>
+              <a:rPr lang="en-US" altLang="ko-KR" sz="1200" b="1">
+                <a:solidFill>
+                  <a:srgbClr val="C00000"/>
+                </a:solidFill>
+              </a:rPr>
+              <a:t>FinT&lt;IO, T&gt;</a:t>
+            </a:r>
+            <a:endParaRPr lang="ko-KR" altLang="en-US" sz="1200" b="1">
+              <a:solidFill>
+                <a:srgbClr val="C00000"/>
+              </a:solidFill>
+            </a:endParaRPr>
+          </a:p>
+        </p:txBody>
+      </p:sp>
+      <p:sp>
+        <p:nvSpPr>
+          <p:cNvPr id="23" name="TextBox 22">
+            <a:extLst>
+              <a:ext uri="{FF2B5EF4-FFF2-40B4-BE49-F238E27FC236}">
+                <a16:creationId xmlns:a16="http://schemas.microsoft.com/office/drawing/2014/main" id="{679DD95D-4D18-DA4D-6926-65A9CEA63EE4}"/>
+              </a:ext>
+            </a:extLst>
+          </p:cNvPr>
+          <p:cNvSpPr txBox="1"/>
+          <p:nvPr/>
+        </p:nvSpPr>
+        <p:spPr>
+          <a:xfrm>
+            <a:off x="4740409" y="1195532"/>
+            <a:ext cx="4398961" cy="1580113"/>
+          </a:xfrm>
+          <a:prstGeom prst="rect">
+            <a:avLst/>
+          </a:prstGeom>
+          <a:noFill/>
+        </p:spPr>
+        <p:txBody>
+          <a:bodyPr wrap="none" rtlCol="0">
+            <a:spAutoFit/>
+          </a:bodyPr>
+          <a:lstStyle/>
+          <a:p>
+            <a:pPr>
+              <a:lnSpc>
+                <a:spcPct val="150000"/>
+              </a:lnSpc>
+            </a:pPr>
+            <a:r>
+              <a:rPr lang="en-US" altLang="ko-KR" sz="1200" b="1">
+                <a:solidFill>
+                  <a:srgbClr val="C00000"/>
+                </a:solidFill>
+              </a:rPr>
+              <a:t>CQRS</a:t>
+            </a:r>
+          </a:p>
+          <a:p>
+            <a:pPr marL="266700" lvl="1" indent="-179388">
+              <a:lnSpc>
+                <a:spcPct val="150000"/>
+              </a:lnSpc>
+              <a:buFontTx/>
+              <a:buChar char="-"/>
+            </a:pPr>
+            <a:r>
+              <a:rPr lang="en-US" altLang="ko-KR" sz="1000">
+                <a:solidFill>
+                  <a:srgbClr val="C00000"/>
+                </a:solidFill>
+              </a:rPr>
+              <a:t>ICommandRequest&lt;TInput&gt;, ICommandUsecase&lt;TInput, TOutput&gt;</a:t>
+            </a:r>
+          </a:p>
+          <a:p>
+            <a:pPr marL="266700" lvl="1" indent="-179388">
+              <a:lnSpc>
+                <a:spcPct val="150000"/>
+              </a:lnSpc>
+              <a:buFontTx/>
+              <a:buChar char="-"/>
+            </a:pPr>
+            <a:r>
+              <a:rPr lang="en-US" altLang="ko-KR" sz="1000">
+                <a:solidFill>
+                  <a:srgbClr val="C00000"/>
+                </a:solidFill>
+              </a:rPr>
+              <a:t>IQueryRequest&lt;TInput&gt;, IQueryUsecase&lt;TInput, TOutput&gt;</a:t>
+            </a:r>
+          </a:p>
+          <a:p>
+            <a:pPr marL="266700" lvl="1" indent="-179388">
+              <a:lnSpc>
+                <a:spcPct val="150000"/>
+              </a:lnSpc>
+              <a:buFontTx/>
+              <a:buChar char="-"/>
+            </a:pPr>
+            <a:r>
+              <a:rPr lang="en-US" altLang="ko-KR" sz="1000">
+                <a:solidFill>
+                  <a:srgbClr val="C00000"/>
+                </a:solidFill>
+              </a:rPr>
+              <a:t>IFinResponse&lt;T&gt;</a:t>
+            </a:r>
+          </a:p>
+          <a:p>
+            <a:pPr>
+              <a:lnSpc>
+                <a:spcPct val="150000"/>
+              </a:lnSpc>
+            </a:pPr>
+            <a:r>
+              <a:rPr lang="en-US" altLang="ko-KR" sz="1200" b="1">
+                <a:solidFill>
+                  <a:srgbClr val="C00000"/>
+                </a:solidFill>
+              </a:rPr>
+              <a:t>Observability CQRS Pipeline</a:t>
+            </a:r>
+          </a:p>
+          <a:p>
+            <a:pPr>
+              <a:lnSpc>
+                <a:spcPct val="150000"/>
+              </a:lnSpc>
+            </a:pPr>
+            <a:r>
+              <a:rPr lang="en-US" altLang="ko-KR" sz="1200" b="1">
+                <a:solidFill>
+                  <a:srgbClr val="C00000"/>
+                </a:solidFill>
+              </a:rPr>
+              <a:t>FinT&lt;IO, T&gt; LINQ</a:t>
+            </a:r>
+            <a:endParaRPr lang="ko-KR" altLang="en-US" sz="1200" b="1">
+              <a:solidFill>
+                <a:srgbClr val="C00000"/>
+              </a:solidFill>
+            </a:endParaRPr>
+          </a:p>
+        </p:txBody>
+      </p:sp>
       <p:sp>
         <p:nvSpPr>
           <p:cNvPr id="6" name="직사각형 5">
@@ -4632,6 +4592,131 @@
           <a:p>
             <a:pPr algn="ctr"/>
             <a:endParaRPr lang="en-GB"/>
+          </a:p>
+        </p:txBody>
+      </p:sp>
+      <p:sp>
+        <p:nvSpPr>
+          <p:cNvPr id="10" name="TextBox 9">
+            <a:extLst>
+              <a:ext uri="{FF2B5EF4-FFF2-40B4-BE49-F238E27FC236}">
+                <a16:creationId xmlns:a16="http://schemas.microsoft.com/office/drawing/2014/main" id="{AFFFC683-418C-82B0-C157-13538F74C076}"/>
+              </a:ext>
+            </a:extLst>
+          </p:cNvPr>
+          <p:cNvSpPr txBox="1"/>
+          <p:nvPr/>
+        </p:nvSpPr>
+        <p:spPr>
+          <a:xfrm>
+            <a:off x="1794987" y="1195532"/>
+            <a:ext cx="2027093" cy="1580113"/>
+          </a:xfrm>
+          <a:prstGeom prst="rect">
+            <a:avLst/>
+          </a:prstGeom>
+          <a:noFill/>
+        </p:spPr>
+        <p:txBody>
+          <a:bodyPr wrap="none" rtlCol="0">
+            <a:spAutoFit/>
+          </a:bodyPr>
+          <a:lstStyle/>
+          <a:p>
+            <a:pPr>
+              <a:lnSpc>
+                <a:spcPct val="150000"/>
+              </a:lnSpc>
+            </a:pPr>
+            <a:r>
+              <a:rPr lang="en-US" altLang="ko-KR" sz="1200" b="1">
+                <a:solidFill>
+                  <a:srgbClr val="C00000"/>
+                </a:solidFill>
+              </a:rPr>
+              <a:t>Structured Error</a:t>
+            </a:r>
+          </a:p>
+          <a:p>
+            <a:pPr marL="266700" lvl="1" indent="-179388">
+              <a:lnSpc>
+                <a:spcPct val="150000"/>
+              </a:lnSpc>
+              <a:buFontTx/>
+              <a:buChar char="-"/>
+            </a:pPr>
+            <a:r>
+              <a:rPr lang="en-US" altLang="ko-KR" sz="1000">
+                <a:solidFill>
+                  <a:srgbClr val="C00000"/>
+                </a:solidFill>
+              </a:rPr>
+              <a:t>ErrorCodeExpected </a:t>
+            </a:r>
+          </a:p>
+          <a:p>
+            <a:pPr marL="266700" lvl="1" indent="-179388">
+              <a:lnSpc>
+                <a:spcPct val="150000"/>
+              </a:lnSpc>
+              <a:buFontTx/>
+              <a:buChar char="-"/>
+            </a:pPr>
+            <a:r>
+              <a:rPr lang="en-US" altLang="ko-KR" sz="1000">
+                <a:solidFill>
+                  <a:srgbClr val="C00000"/>
+                </a:solidFill>
+              </a:rPr>
+              <a:t>ErrorCodeExceptional </a:t>
+            </a:r>
+          </a:p>
+          <a:p>
+            <a:pPr marL="266700" lvl="1" indent="-179388">
+              <a:lnSpc>
+                <a:spcPct val="150000"/>
+              </a:lnSpc>
+              <a:buFontTx/>
+              <a:buChar char="-"/>
+            </a:pPr>
+            <a:r>
+              <a:rPr lang="en-US" altLang="ko-KR" sz="1000">
+                <a:solidFill>
+                  <a:srgbClr val="C00000"/>
+                </a:solidFill>
+              </a:rPr>
+              <a:t>ManyErrors</a:t>
+            </a:r>
+          </a:p>
+          <a:p>
+            <a:pPr>
+              <a:lnSpc>
+                <a:spcPct val="150000"/>
+              </a:lnSpc>
+            </a:pPr>
+            <a:r>
+              <a:rPr lang="en-US" altLang="ko-KR" sz="1200" b="1">
+                <a:solidFill>
+                  <a:srgbClr val="C00000"/>
+                </a:solidFill>
+              </a:rPr>
+              <a:t>Observability Pipeline</a:t>
+            </a:r>
+          </a:p>
+          <a:p>
+            <a:pPr>
+              <a:lnSpc>
+                <a:spcPct val="150000"/>
+              </a:lnSpc>
+            </a:pPr>
+            <a:r>
+              <a:rPr lang="en-US" altLang="ko-KR" sz="1200" b="1">
+                <a:solidFill>
+                  <a:srgbClr val="C00000"/>
+                </a:solidFill>
+              </a:rPr>
+              <a:t>Dependency Registration</a:t>
+            </a:r>
           </a:p>
         </p:txBody>
       </p:sp>

--- a/Functorium.pptx
+++ b/Functorium.pptx
@@ -260,7 +260,7 @@
           <a:p>
             <a:fld id="{A556ABB1-B727-42E1-97D8-FD52BC4C149B}" type="datetimeFigureOut">
               <a:rPr lang="ko-KR" altLang="en-US" smtClean="0"/>
-              <a:t>2026-01-20</a:t>
+              <a:t>2026-01-24</a:t>
             </a:fld>
             <a:endParaRPr lang="ko-KR" altLang="en-US"/>
           </a:p>
@@ -458,7 +458,7 @@
           <a:p>
             <a:fld id="{A556ABB1-B727-42E1-97D8-FD52BC4C149B}" type="datetimeFigureOut">
               <a:rPr lang="ko-KR" altLang="en-US" smtClean="0"/>
-              <a:t>2026-01-20</a:t>
+              <a:t>2026-01-24</a:t>
             </a:fld>
             <a:endParaRPr lang="ko-KR" altLang="en-US"/>
           </a:p>
@@ -666,7 +666,7 @@
           <a:p>
             <a:fld id="{A556ABB1-B727-42E1-97D8-FD52BC4C149B}" type="datetimeFigureOut">
               <a:rPr lang="ko-KR" altLang="en-US" smtClean="0"/>
-              <a:t>2026-01-20</a:t>
+              <a:t>2026-01-24</a:t>
             </a:fld>
             <a:endParaRPr lang="ko-KR" altLang="en-US"/>
           </a:p>
@@ -864,7 +864,7 @@
           <a:p>
             <a:fld id="{A556ABB1-B727-42E1-97D8-FD52BC4C149B}" type="datetimeFigureOut">
               <a:rPr lang="ko-KR" altLang="en-US" smtClean="0"/>
-              <a:t>2026-01-20</a:t>
+              <a:t>2026-01-24</a:t>
             </a:fld>
             <a:endParaRPr lang="ko-KR" altLang="en-US"/>
           </a:p>
@@ -1139,7 +1139,7 @@
           <a:p>
             <a:fld id="{A556ABB1-B727-42E1-97D8-FD52BC4C149B}" type="datetimeFigureOut">
               <a:rPr lang="ko-KR" altLang="en-US" smtClean="0"/>
-              <a:t>2026-01-20</a:t>
+              <a:t>2026-01-24</a:t>
             </a:fld>
             <a:endParaRPr lang="ko-KR" altLang="en-US"/>
           </a:p>
@@ -1404,7 +1404,7 @@
           <a:p>
             <a:fld id="{A556ABB1-B727-42E1-97D8-FD52BC4C149B}" type="datetimeFigureOut">
               <a:rPr lang="ko-KR" altLang="en-US" smtClean="0"/>
-              <a:t>2026-01-20</a:t>
+              <a:t>2026-01-24</a:t>
             </a:fld>
             <a:endParaRPr lang="ko-KR" altLang="en-US"/>
           </a:p>
@@ -1816,7 +1816,7 @@
           <a:p>
             <a:fld id="{A556ABB1-B727-42E1-97D8-FD52BC4C149B}" type="datetimeFigureOut">
               <a:rPr lang="ko-KR" altLang="en-US" smtClean="0"/>
-              <a:t>2026-01-20</a:t>
+              <a:t>2026-01-24</a:t>
             </a:fld>
             <a:endParaRPr lang="ko-KR" altLang="en-US"/>
           </a:p>
@@ -1957,7 +1957,7 @@
           <a:p>
             <a:fld id="{A556ABB1-B727-42E1-97D8-FD52BC4C149B}" type="datetimeFigureOut">
               <a:rPr lang="ko-KR" altLang="en-US" smtClean="0"/>
-              <a:t>2026-01-20</a:t>
+              <a:t>2026-01-24</a:t>
             </a:fld>
             <a:endParaRPr lang="ko-KR" altLang="en-US"/>
           </a:p>
@@ -2070,7 +2070,7 @@
           <a:p>
             <a:fld id="{A556ABB1-B727-42E1-97D8-FD52BC4C149B}" type="datetimeFigureOut">
               <a:rPr lang="ko-KR" altLang="en-US" smtClean="0"/>
-              <a:t>2026-01-20</a:t>
+              <a:t>2026-01-24</a:t>
             </a:fld>
             <a:endParaRPr lang="ko-KR" altLang="en-US"/>
           </a:p>
@@ -2381,7 +2381,7 @@
           <a:p>
             <a:fld id="{A556ABB1-B727-42E1-97D8-FD52BC4C149B}" type="datetimeFigureOut">
               <a:rPr lang="ko-KR" altLang="en-US" smtClean="0"/>
-              <a:t>2026-01-20</a:t>
+              <a:t>2026-01-24</a:t>
             </a:fld>
             <a:endParaRPr lang="ko-KR" altLang="en-US"/>
           </a:p>
@@ -2669,7 +2669,7 @@
           <a:p>
             <a:fld id="{A556ABB1-B727-42E1-97D8-FD52BC4C149B}" type="datetimeFigureOut">
               <a:rPr lang="ko-KR" altLang="en-US" smtClean="0"/>
-              <a:t>2026-01-20</a:t>
+              <a:t>2026-01-24</a:t>
             </a:fld>
             <a:endParaRPr lang="ko-KR" altLang="en-US"/>
           </a:p>
@@ -2910,7 +2910,7 @@
           <a:p>
             <a:fld id="{A556ABB1-B727-42E1-97D8-FD52BC4C149B}" type="datetimeFigureOut">
               <a:rPr lang="ko-KR" altLang="en-US" smtClean="0"/>
-              <a:t>2026-01-20</a:t>
+              <a:t>2026-01-24</a:t>
             </a:fld>
             <a:endParaRPr lang="ko-KR" altLang="en-US"/>
           </a:p>
@@ -3347,7 +3347,7 @@
         </p:nvSpPr>
         <p:spPr>
           <a:xfrm>
-            <a:off x="955964" y="2215918"/>
+            <a:off x="955964" y="2137991"/>
             <a:ext cx="10790959" cy="264124"/>
           </a:xfrm>
           <a:prstGeom prst="rect">
@@ -3407,7 +3407,7 @@
         </p:nvSpPr>
         <p:spPr>
           <a:xfrm>
-            <a:off x="4890789" y="4469319"/>
+            <a:off x="4890789" y="4401783"/>
             <a:ext cx="2702504" cy="2597849"/>
           </a:xfrm>
           <a:prstGeom prst="ellipse">
@@ -3445,12 +3445,164 @@
           </a:p>
         </p:txBody>
       </p:sp>
+      <p:pic>
+        <p:nvPicPr>
+          <p:cNvPr id="5" name="그림 4">
+            <a:extLst>
+              <a:ext uri="{FF2B5EF4-FFF2-40B4-BE49-F238E27FC236}">
+                <a16:creationId xmlns:a16="http://schemas.microsoft.com/office/drawing/2014/main" id="{0DEEA421-8C55-5E07-24EA-5807E6AC039C}"/>
+              </a:ext>
+            </a:extLst>
+          </p:cNvPr>
+          <p:cNvPicPr>
+            <a:picLocks noChangeAspect="1"/>
+          </p:cNvPicPr>
+          <p:nvPr/>
+        </p:nvPicPr>
+        <p:blipFill>
+          <a:blip r:embed="rId2"/>
+          <a:stretch>
+            <a:fillRect/>
+          </a:stretch>
+        </p:blipFill>
+        <p:spPr>
+          <a:xfrm>
+            <a:off x="1928131" y="2824482"/>
+            <a:ext cx="5270425" cy="1214438"/>
+          </a:xfrm>
+          <a:prstGeom prst="rect">
+            <a:avLst/>
+          </a:prstGeom>
+        </p:spPr>
+      </p:pic>
+      <p:pic>
+        <p:nvPicPr>
+          <p:cNvPr id="7" name="그림 6">
+            <a:extLst>
+              <a:ext uri="{FF2B5EF4-FFF2-40B4-BE49-F238E27FC236}">
+                <a16:creationId xmlns:a16="http://schemas.microsoft.com/office/drawing/2014/main" id="{8769B09C-7A5B-D282-E29D-191084964936}"/>
+              </a:ext>
+            </a:extLst>
+          </p:cNvPr>
+          <p:cNvPicPr>
+            <a:picLocks noChangeAspect="1"/>
+          </p:cNvPicPr>
+          <p:nvPr/>
+        </p:nvPicPr>
+        <p:blipFill>
+          <a:blip r:embed="rId3"/>
+          <a:stretch>
+            <a:fillRect/>
+          </a:stretch>
+        </p:blipFill>
+        <p:spPr>
+          <a:xfrm>
+            <a:off x="7017766" y="2832342"/>
+            <a:ext cx="3773011" cy="1120113"/>
+          </a:xfrm>
+          <a:prstGeom prst="rect">
+            <a:avLst/>
+          </a:prstGeom>
+        </p:spPr>
+      </p:pic>
+      <p:cxnSp>
+        <p:nvCxnSpPr>
+          <p:cNvPr id="12" name="직선 연결선 11">
+            <a:extLst>
+              <a:ext uri="{FF2B5EF4-FFF2-40B4-BE49-F238E27FC236}">
+                <a16:creationId xmlns:a16="http://schemas.microsoft.com/office/drawing/2014/main" id="{9860EDCC-6E4A-DCFB-4887-29FF771218FA}"/>
+              </a:ext>
+            </a:extLst>
+          </p:cNvPr>
+          <p:cNvCxnSpPr>
+            <a:cxnSpLocks/>
+          </p:cNvCxnSpPr>
+          <p:nvPr/>
+        </p:nvCxnSpPr>
+        <p:spPr>
+          <a:xfrm>
+            <a:off x="4721154" y="312659"/>
+            <a:ext cx="0" cy="5424578"/>
+          </a:xfrm>
+          <a:prstGeom prst="line">
+            <a:avLst/>
+          </a:prstGeom>
+          <a:ln>
+            <a:solidFill>
+              <a:schemeClr val="bg1">
+                <a:lumMod val="85000"/>
+              </a:schemeClr>
+            </a:solidFill>
+            <a:prstDash val="dash"/>
+          </a:ln>
+        </p:spPr>
+        <p:style>
+          <a:lnRef idx="2">
+            <a:schemeClr val="accent1"/>
+          </a:lnRef>
+          <a:fillRef idx="0">
+            <a:schemeClr val="accent1"/>
+          </a:fillRef>
+          <a:effectRef idx="1">
+            <a:schemeClr val="accent1"/>
+          </a:effectRef>
+          <a:fontRef idx="minor">
+            <a:schemeClr val="tx1"/>
+          </a:fontRef>
+        </p:style>
+      </p:cxnSp>
+      <p:cxnSp>
+        <p:nvCxnSpPr>
+          <p:cNvPr id="13" name="직선 연결선 12">
+            <a:extLst>
+              <a:ext uri="{FF2B5EF4-FFF2-40B4-BE49-F238E27FC236}">
+                <a16:creationId xmlns:a16="http://schemas.microsoft.com/office/drawing/2014/main" id="{717E0259-F161-E906-6807-37A82DE12543}"/>
+              </a:ext>
+            </a:extLst>
+          </p:cNvPr>
+          <p:cNvCxnSpPr>
+            <a:cxnSpLocks/>
+          </p:cNvCxnSpPr>
+          <p:nvPr/>
+        </p:nvCxnSpPr>
+        <p:spPr>
+          <a:xfrm>
+            <a:off x="7845354" y="312659"/>
+            <a:ext cx="0" cy="5424578"/>
+          </a:xfrm>
+          <a:prstGeom prst="line">
+            <a:avLst/>
+          </a:prstGeom>
+          <a:ln>
+            <a:solidFill>
+              <a:schemeClr val="bg1">
+                <a:lumMod val="85000"/>
+              </a:schemeClr>
+            </a:solidFill>
+            <a:prstDash val="dash"/>
+          </a:ln>
+        </p:spPr>
+        <p:style>
+          <a:lnRef idx="2">
+            <a:schemeClr val="accent1"/>
+          </a:lnRef>
+          <a:fillRef idx="0">
+            <a:schemeClr val="accent1"/>
+          </a:fillRef>
+          <a:effectRef idx="1">
+            <a:schemeClr val="accent1"/>
+          </a:effectRef>
+          <a:fontRef idx="minor">
+            <a:schemeClr val="tx1"/>
+          </a:fontRef>
+        </p:style>
+      </p:cxnSp>
       <p:grpSp>
         <p:nvGrpSpPr>
-          <p:cNvPr id="8" name="그룹 7">
-            <a:extLst>
-              <a:ext uri="{FF2B5EF4-FFF2-40B4-BE49-F238E27FC236}">
-                <a16:creationId xmlns:a16="http://schemas.microsoft.com/office/drawing/2014/main" id="{29FBFE93-4EBE-85F6-0CC9-061083282764}"/>
+          <p:cNvPr id="31" name="그룹 30">
+            <a:extLst>
+              <a:ext uri="{FF2B5EF4-FFF2-40B4-BE49-F238E27FC236}">
+                <a16:creationId xmlns:a16="http://schemas.microsoft.com/office/drawing/2014/main" id="{3B138185-6639-A2B7-BA25-7D42353A3241}"/>
               </a:ext>
             </a:extLst>
           </p:cNvPr>
@@ -3459,201 +3611,7 @@
         </p:nvGrpSpPr>
         <p:grpSpPr>
           <a:xfrm>
-            <a:off x="1928131" y="2850454"/>
-            <a:ext cx="8862646" cy="1214438"/>
-            <a:chOff x="2476500" y="2557462"/>
-            <a:chExt cx="7159625" cy="981075"/>
-          </a:xfrm>
-        </p:grpSpPr>
-        <p:pic>
-          <p:nvPicPr>
-            <p:cNvPr id="5" name="그림 4">
-              <a:extLst>
-                <a:ext uri="{FF2B5EF4-FFF2-40B4-BE49-F238E27FC236}">
-                  <a16:creationId xmlns:a16="http://schemas.microsoft.com/office/drawing/2014/main" id="{0DEEA421-8C55-5E07-24EA-5807E6AC039C}"/>
-                </a:ext>
-              </a:extLst>
-            </p:cNvPr>
-            <p:cNvPicPr>
-              <a:picLocks noChangeAspect="1"/>
-            </p:cNvPicPr>
-            <p:nvPr/>
-          </p:nvPicPr>
-          <p:blipFill>
-            <a:blip r:embed="rId2"/>
-            <a:stretch>
-              <a:fillRect/>
-            </a:stretch>
-          </p:blipFill>
-          <p:spPr>
-            <a:xfrm>
-              <a:off x="2476500" y="2557462"/>
-              <a:ext cx="4257675" cy="981075"/>
-            </a:xfrm>
-            <a:prstGeom prst="rect">
-              <a:avLst/>
-            </a:prstGeom>
-          </p:spPr>
-        </p:pic>
-        <p:pic>
-          <p:nvPicPr>
-            <p:cNvPr id="7" name="그림 6">
-              <a:extLst>
-                <a:ext uri="{FF2B5EF4-FFF2-40B4-BE49-F238E27FC236}">
-                  <a16:creationId xmlns:a16="http://schemas.microsoft.com/office/drawing/2014/main" id="{8769B09C-7A5B-D282-E29D-191084964936}"/>
-                </a:ext>
-              </a:extLst>
-            </p:cNvPr>
-            <p:cNvPicPr>
-              <a:picLocks noChangeAspect="1"/>
-            </p:cNvPicPr>
-            <p:nvPr/>
-          </p:nvPicPr>
-          <p:blipFill>
-            <a:blip r:embed="rId3"/>
-            <a:stretch>
-              <a:fillRect/>
-            </a:stretch>
-          </p:blipFill>
-          <p:spPr>
-            <a:xfrm>
-              <a:off x="6588125" y="2563812"/>
-              <a:ext cx="3048000" cy="904875"/>
-            </a:xfrm>
-            <a:prstGeom prst="rect">
-              <a:avLst/>
-            </a:prstGeom>
-          </p:spPr>
-        </p:pic>
-      </p:grpSp>
-      <p:grpSp>
-        <p:nvGrpSpPr>
-          <p:cNvPr id="37" name="그룹 36">
-            <a:extLst>
-              <a:ext uri="{FF2B5EF4-FFF2-40B4-BE49-F238E27FC236}">
-                <a16:creationId xmlns:a16="http://schemas.microsoft.com/office/drawing/2014/main" id="{960E446E-FFC8-5CCD-E9D6-B6F70ECF584E}"/>
-              </a:ext>
-            </a:extLst>
-          </p:cNvPr>
-          <p:cNvGrpSpPr/>
-          <p:nvPr/>
-        </p:nvGrpSpPr>
-        <p:grpSpPr>
-          <a:xfrm>
-            <a:off x="4721154" y="312658"/>
-            <a:ext cx="3124200" cy="5611719"/>
-            <a:chOff x="4679941" y="414259"/>
-            <a:chExt cx="3124200" cy="5470214"/>
-          </a:xfrm>
-        </p:grpSpPr>
-        <p:cxnSp>
-          <p:nvCxnSpPr>
-            <p:cNvPr id="12" name="직선 연결선 11">
-              <a:extLst>
-                <a:ext uri="{FF2B5EF4-FFF2-40B4-BE49-F238E27FC236}">
-                  <a16:creationId xmlns:a16="http://schemas.microsoft.com/office/drawing/2014/main" id="{9860EDCC-6E4A-DCFB-4887-29FF771218FA}"/>
-                </a:ext>
-              </a:extLst>
-            </p:cNvPr>
-            <p:cNvCxnSpPr>
-              <a:cxnSpLocks/>
-            </p:cNvCxnSpPr>
-            <p:nvPr/>
-          </p:nvCxnSpPr>
-          <p:spPr>
-            <a:xfrm>
-              <a:off x="4679941" y="414259"/>
-              <a:ext cx="0" cy="5470214"/>
-            </a:xfrm>
-            <a:prstGeom prst="line">
-              <a:avLst/>
-            </a:prstGeom>
-            <a:ln>
-              <a:solidFill>
-                <a:schemeClr val="bg1">
-                  <a:lumMod val="85000"/>
-                </a:schemeClr>
-              </a:solidFill>
-              <a:prstDash val="dash"/>
-            </a:ln>
-          </p:spPr>
-          <p:style>
-            <a:lnRef idx="2">
-              <a:schemeClr val="accent1"/>
-            </a:lnRef>
-            <a:fillRef idx="0">
-              <a:schemeClr val="accent1"/>
-            </a:fillRef>
-            <a:effectRef idx="1">
-              <a:schemeClr val="accent1"/>
-            </a:effectRef>
-            <a:fontRef idx="minor">
-              <a:schemeClr val="tx1"/>
-            </a:fontRef>
-          </p:style>
-        </p:cxnSp>
-        <p:cxnSp>
-          <p:nvCxnSpPr>
-            <p:cNvPr id="13" name="직선 연결선 12">
-              <a:extLst>
-                <a:ext uri="{FF2B5EF4-FFF2-40B4-BE49-F238E27FC236}">
-                  <a16:creationId xmlns:a16="http://schemas.microsoft.com/office/drawing/2014/main" id="{717E0259-F161-E906-6807-37A82DE12543}"/>
-                </a:ext>
-              </a:extLst>
-            </p:cNvPr>
-            <p:cNvCxnSpPr>
-              <a:cxnSpLocks/>
-            </p:cNvCxnSpPr>
-            <p:nvPr/>
-          </p:nvCxnSpPr>
-          <p:spPr>
-            <a:xfrm>
-              <a:off x="7804141" y="414259"/>
-              <a:ext cx="0" cy="5470214"/>
-            </a:xfrm>
-            <a:prstGeom prst="line">
-              <a:avLst/>
-            </a:prstGeom>
-            <a:ln>
-              <a:solidFill>
-                <a:schemeClr val="bg1">
-                  <a:lumMod val="85000"/>
-                </a:schemeClr>
-              </a:solidFill>
-              <a:prstDash val="dash"/>
-            </a:ln>
-          </p:spPr>
-          <p:style>
-            <a:lnRef idx="2">
-              <a:schemeClr val="accent1"/>
-            </a:lnRef>
-            <a:fillRef idx="0">
-              <a:schemeClr val="accent1"/>
-            </a:fillRef>
-            <a:effectRef idx="1">
-              <a:schemeClr val="accent1"/>
-            </a:effectRef>
-            <a:fontRef idx="minor">
-              <a:schemeClr val="tx1"/>
-            </a:fontRef>
-          </p:style>
-        </p:cxnSp>
-      </p:grpSp>
-      <p:grpSp>
-        <p:nvGrpSpPr>
-          <p:cNvPr id="31" name="그룹 30">
-            <a:extLst>
-              <a:ext uri="{FF2B5EF4-FFF2-40B4-BE49-F238E27FC236}">
-                <a16:creationId xmlns:a16="http://schemas.microsoft.com/office/drawing/2014/main" id="{3B138185-6639-A2B7-BA25-7D42353A3241}"/>
-              </a:ext>
-            </a:extLst>
-          </p:cNvPr>
-          <p:cNvGrpSpPr/>
-          <p:nvPr/>
-        </p:nvGrpSpPr>
-        <p:grpSpPr>
-          <a:xfrm>
-            <a:off x="1111179" y="3378784"/>
+            <a:off x="1111179" y="3352812"/>
             <a:ext cx="10480528" cy="0"/>
             <a:chOff x="1069966" y="3175585"/>
             <a:chExt cx="10480528" cy="0"/>
@@ -3756,7 +3714,7 @@
         </p:nvSpPr>
         <p:spPr>
           <a:xfrm>
-            <a:off x="5504465" y="5004268"/>
+            <a:off x="5504465" y="4978296"/>
             <a:ext cx="1513301" cy="758941"/>
           </a:xfrm>
           <a:prstGeom prst="rect">
@@ -3810,7 +3768,7 @@
         </p:nvCxnSpPr>
         <p:spPr>
           <a:xfrm>
-            <a:off x="6261116" y="3750567"/>
+            <a:off x="6261116" y="3724595"/>
             <a:ext cx="0" cy="1253701"/>
           </a:xfrm>
           <a:prstGeom prst="straightConnector1">
@@ -3852,7 +3810,7 @@
         </p:nvSpPr>
         <p:spPr>
           <a:xfrm flipV="1">
-            <a:off x="6124235" y="3507738"/>
+            <a:off x="6124235" y="3481766"/>
             <a:ext cx="273761" cy="242829"/>
           </a:xfrm>
           <a:prstGeom prst="rect">
@@ -3904,7 +3862,7 @@
         </p:nvSpPr>
         <p:spPr>
           <a:xfrm flipV="1">
-            <a:off x="6124235" y="5004268"/>
+            <a:off x="6124235" y="4978296"/>
             <a:ext cx="273761" cy="242829"/>
           </a:xfrm>
           <a:prstGeom prst="rect">
@@ -3956,7 +3914,7 @@
         </p:nvSpPr>
         <p:spPr>
           <a:xfrm>
-            <a:off x="5784505" y="5214461"/>
+            <a:off x="5784505" y="5188489"/>
             <a:ext cx="946093" cy="338554"/>
           </a:xfrm>
           <a:prstGeom prst="rect">
@@ -4000,7 +3958,7 @@
         </p:nvSpPr>
         <p:spPr>
           <a:xfrm>
-            <a:off x="1941479" y="730414"/>
+            <a:off x="1941479" y="460260"/>
             <a:ext cx="1729641" cy="369332"/>
           </a:xfrm>
           <a:prstGeom prst="rect">
@@ -4053,7 +4011,7 @@
         </p:nvSpPr>
         <p:spPr>
           <a:xfrm>
-            <a:off x="8995179" y="730414"/>
+            <a:off x="8995179" y="460260"/>
             <a:ext cx="1729641" cy="369332"/>
           </a:xfrm>
           <a:prstGeom prst="rect">
@@ -4106,8 +4064,8 @@
         </p:nvSpPr>
         <p:spPr>
           <a:xfrm>
-            <a:off x="5232774" y="730414"/>
-            <a:ext cx="2100960" cy="369332"/>
+            <a:off x="5232774" y="460260"/>
+            <a:ext cx="2100960" cy="650884"/>
           </a:xfrm>
           <a:prstGeom prst="rect">
             <a:avLst/>
@@ -4136,6 +4094,21 @@
               </a:rPr>
               <a:t>Layer</a:t>
             </a:r>
+          </a:p>
+          <a:p>
+            <a:pPr algn="ctr">
+              <a:lnSpc>
+                <a:spcPct val="150000"/>
+              </a:lnSpc>
+            </a:pPr>
+            <a:r>
+              <a:rPr lang="en-GB" altLang="ko-KR" sz="1400" b="1">
+                <a:solidFill>
+                  <a:srgbClr val="0070C0"/>
+                </a:solidFill>
+              </a:rPr>
+              <a:t>(Use Case)</a:t>
+            </a:r>
             <a:endParaRPr lang="ko-KR" altLang="en-US" b="1">
               <a:solidFill>
                 <a:srgbClr val="0070C0"/>
@@ -4158,7 +4131,7 @@
         </p:nvSpPr>
         <p:spPr>
           <a:xfrm>
-            <a:off x="4839335" y="5837316"/>
+            <a:off x="4839335" y="5754199"/>
             <a:ext cx="2900515" cy="877284"/>
           </a:xfrm>
           <a:prstGeom prst="rect">
@@ -4221,8 +4194,8 @@
         </p:nvSpPr>
         <p:spPr>
           <a:xfrm>
-            <a:off x="5429941" y="5922584"/>
-            <a:ext cx="1706621" cy="369332"/>
+            <a:off x="5429941" y="5834271"/>
+            <a:ext cx="1706621" cy="650884"/>
           </a:xfrm>
           <a:prstGeom prst="rect">
             <a:avLst/>
@@ -4251,7 +4224,22 @@
               </a:rPr>
               <a:t>Layer</a:t>
             </a:r>
-            <a:endParaRPr lang="ko-KR" altLang="en-US" b="1">
+          </a:p>
+          <a:p>
+            <a:pPr algn="ctr">
+              <a:lnSpc>
+                <a:spcPct val="150000"/>
+              </a:lnSpc>
+            </a:pPr>
+            <a:r>
+              <a:rPr lang="en-GB" altLang="ko-KR" sz="1400" b="1">
+                <a:solidFill>
+                  <a:srgbClr val="0070C0"/>
+                </a:solidFill>
+              </a:rPr>
+              <a:t>(Aggregate Root)</a:t>
+            </a:r>
+            <a:endParaRPr lang="ko-KR" altLang="en-US" sz="1400" b="1">
               <a:solidFill>
                 <a:srgbClr val="0070C0"/>
               </a:solidFill>
@@ -4273,7 +4261,7 @@
         </p:nvSpPr>
         <p:spPr>
           <a:xfrm>
-            <a:off x="4543201" y="4199006"/>
+            <a:off x="4543201" y="4173034"/>
             <a:ext cx="1661993" cy="610616"/>
           </a:xfrm>
           <a:prstGeom prst="rect">
@@ -4353,7 +4341,7 @@
         </p:nvSpPr>
         <p:spPr>
           <a:xfrm>
-            <a:off x="8846654" y="1888030"/>
+            <a:off x="8846654" y="1810103"/>
             <a:ext cx="2485937" cy="887615"/>
           </a:xfrm>
           <a:prstGeom prst="rect">
@@ -4432,7 +4420,7 @@
         </p:nvSpPr>
         <p:spPr>
           <a:xfrm>
-            <a:off x="4740409" y="1195532"/>
+            <a:off x="4740409" y="1117605"/>
             <a:ext cx="4398961" cy="1580113"/>
           </a:xfrm>
           <a:prstGeom prst="rect">
@@ -4609,7 +4597,7 @@
         </p:nvSpPr>
         <p:spPr>
           <a:xfrm>
-            <a:off x="1794987" y="1195532"/>
+            <a:off x="1794987" y="1117605"/>
             <a:ext cx="2027093" cy="1580113"/>
           </a:xfrm>
           <a:prstGeom prst="rect">
